--- a/backend/app/downloads/executive_summary_deck.pptx
+++ b/backend/app/downloads/executive_summary_deck.pptx
@@ -10,6 +10,9 @@
     <p:sldId id="258" r:id="rId9"/>
     <p:sldId id="259" r:id="rId10"/>
     <p:sldId id="260" r:id="rId11"/>
+    <p:sldId id="261" r:id="rId12"/>
+    <p:sldId id="262" r:id="rId13"/>
+    <p:sldId id="263" r:id="rId14"/>
   </p:sldIdLst>
   <p:sldSz cx="12191695" cy="6858000" type="screen4x3"/>
   <p:notesSz cx="6858000" cy="9144000"/>
@@ -3139,14 +3142,59 @@
       </p:sp>
       <p:sp>
         <p:nvSpPr>
-          <p:cNvPr id="3" name="TextBox 2"/>
+          <p:cNvPr id="3" name="Rectangle 2"/>
+          <p:cNvSpPr/>
+          <p:nvPr/>
+        </p:nvSpPr>
+        <p:spPr>
+          <a:xfrm>
+            <a:off x="731520" y="1645920"/>
+            <a:ext cx="137160" cy="3474720"/>
+          </a:xfrm>
+          <a:prstGeom prst="rect">
+            <a:avLst/>
+          </a:prstGeom>
+          <a:solidFill>
+            <a:srgbClr val="0284C7"/>
+          </a:solidFill>
+          <a:ln>
+            <a:solidFill>
+              <a:srgbClr val="0284C7"/>
+            </a:solidFill>
+          </a:ln>
+        </p:spPr>
+        <p:style>
+          <a:lnRef idx="1">
+            <a:schemeClr val="accent1"/>
+          </a:lnRef>
+          <a:fillRef idx="3">
+            <a:schemeClr val="accent1"/>
+          </a:fillRef>
+          <a:effectRef idx="2">
+            <a:schemeClr val="accent1"/>
+          </a:effectRef>
+          <a:fontRef idx="minor">
+            <a:schemeClr val="lt1"/>
+          </a:fontRef>
+        </p:style>
+        <p:txBody>
+          <a:bodyPr rtlCol="0" anchor="ctr"/>
+          <a:lstStyle/>
+          <a:p>
+            <a:pPr algn="ctr"/>
+          </a:p>
+        </p:txBody>
+      </p:sp>
+      <p:sp>
+        <p:nvSpPr>
+          <p:cNvPr id="4" name="TextBox 3"/>
           <p:cNvSpPr txBox="1"/>
           <p:nvPr/>
         </p:nvSpPr>
         <p:spPr>
           <a:xfrm>
-            <a:off x="914400" y="2011680"/>
-            <a:ext cx="10362895" cy="3200400"/>
+            <a:off x="1097280" y="1645920"/>
+            <a:ext cx="10058400" cy="3474720"/>
           </a:xfrm>
           <a:prstGeom prst="rect">
             <a:avLst/>
@@ -3167,7 +3215,7 @@
               </a:defRPr>
             </a:pPr>
             <a:r>
-              <a:t>DIY CO. OTIF DIAGNOSTIC &amp; PROFIT OPTIMIZATION</a:t>
+              <a:t>DIY CO. FULFILLMENT &amp; OTIF DIAGNOSTIC PLATFORM</a:t>
             </a:r>
           </a:p>
           <a:p>
@@ -3179,19 +3227,32 @@
               </a:defRPr>
             </a:pPr>
             <a:r>
-              <a:t>Executive Summary &amp; Operational Action Plan</a:t>
-            </a:r>
-          </a:p>
-          <a:p>
-            <a:pPr>
-              <a:defRPr sz="1400">
+              <a:t>Executive Strategy &amp; Operational Action Plan</a:t>
+            </a:r>
+          </a:p>
+          <a:p>
+            <a:pPr>
+              <a:defRPr sz="1600">
                 <a:solidFill>
                   <a:srgbClr val="94A3B8"/>
                 </a:solidFill>
               </a:defRPr>
             </a:pPr>
             <a:r>
-              <a:t>End-to-End Diagnostic Suite • Multi-Timestamp SLA Audit • Order Assignment Profit Optimizer • 13 SKU Catalog</a:t>
+              <a:t>Solving On-Time In-Full Drops, Financial Penalty Exposures &amp; Decision-Making Tooling Gaps</a:t>
+            </a:r>
+          </a:p>
+          <a:p>
+            <a:br/>
+            <a:pPr>
+              <a:defRPr sz="1200" i="1">
+                <a:solidFill>
+                  <a:srgbClr val="64748B"/>
+                </a:solidFill>
+              </a:defRPr>
+            </a:pPr>
+            <a:r>
+              <a:t>Prepared for: Executive Leadership Team | Date: September 2026</a:t>
             </a:r>
           </a:p>
         </p:txBody>
@@ -3268,7 +3329,7 @@
         <p:spPr>
           <a:xfrm>
             <a:off x="731520" y="137160"/>
-            <a:ext cx="10058400" cy="731520"/>
+            <a:ext cx="10515600" cy="731520"/>
           </a:xfrm>
           <a:prstGeom prst="rect">
             <a:avLst/>
@@ -3289,7 +3350,7 @@
               </a:defRPr>
             </a:pPr>
             <a:r>
-              <a:t>EXECUTIVE SUMMARY DECK</a:t>
+              <a:t>DIY CO. OTIF DIAGNOSTIC &amp; STRATEGY</a:t>
             </a:r>
           </a:p>
           <a:p>
@@ -3301,21 +3362,56 @@
               </a:defRPr>
             </a:pPr>
             <a:r>
-              <a:t>1. Executive Summary &amp; Diagnostic Scope</a:t>
-            </a:r>
-          </a:p>
-        </p:txBody>
-      </p:sp>
-      <p:sp>
-        <p:nvSpPr>
-          <p:cNvPr id="4" name="Rounded Rectangle 3"/>
+              <a:t>1. Business Objective &amp; Current Operational Challenges</a:t>
+            </a:r>
+          </a:p>
+        </p:txBody>
+      </p:sp>
+      <p:sp>
+        <p:nvSpPr>
+          <p:cNvPr id="4" name="TextBox 3"/>
+          <p:cNvSpPr txBox="1"/>
+          <p:nvPr/>
+        </p:nvSpPr>
+        <p:spPr>
+          <a:xfrm>
+            <a:off x="731520" y="6400800"/>
+            <a:ext cx="10728655" cy="365760"/>
+          </a:xfrm>
+          <a:prstGeom prst="rect">
+            <a:avLst/>
+          </a:prstGeom>
+          <a:noFill/>
+        </p:spPr>
+        <p:txBody>
+          <a:bodyPr wrap="none">
+            <a:spAutoFit/>
+          </a:bodyPr>
+          <a:lstStyle/>
+          <a:p>
+            <a:pPr>
+              <a:defRPr sz="900">
+                <a:solidFill>
+                  <a:srgbClr val="64748B"/>
+                </a:solidFill>
+              </a:defRPr>
+            </a:pPr>
+            <a:r>
+              <a:t>DIY Home Improvement Co. | Executive OTIF Strategy | Slide 2 of 8</a:t>
+            </a:r>
+          </a:p>
+        </p:txBody>
+      </p:sp>
+      <p:sp>
+        <p:nvSpPr>
+          <p:cNvPr id="5" name="Rounded Rectangle 4"/>
           <p:cNvSpPr/>
           <p:nvPr/>
         </p:nvSpPr>
         <p:spPr>
           <a:xfrm>
-            <a:off x="731520" y="1371600"/>
-            <a:ext cx="5120640" cy="4846320"/>
+            <a:off x="731520" y="1280160"/>
+            <a:ext cx="5120640" cy="4937760"/>
           </a:xfrm>
           <a:prstGeom prst="roundRect">
             <a:avLst/>
@@ -3355,69 +3451,93 @@
               </a:defRPr>
             </a:pPr>
             <a:r>
-              <a:t>Business Challenge &amp; Context</a:t>
-            </a:r>
-          </a:p>
-          <a:p>
-            <a:pPr>
-              <a:defRPr sz="1300">
+              <a:t>🎯 Business Objective</a:t>
+            </a:r>
+          </a:p>
+          <a:p>
+            <a:r>
+              <a:rPr sz="1200" b="1">
+                <a:solidFill>
+                  <a:srgbClr val="0284C7"/>
+                </a:solidFill>
+              </a:rPr>
+              <a:t>• Protect Net Margin: </a:t>
+            </a:r>
+            <a:r>
+              <a:rPr sz="1200" b="0">
                 <a:solidFill>
                   <a:srgbClr val="1E293B"/>
                 </a:solidFill>
-              </a:defRPr>
-            </a:pPr>
-            <a:r>
-              <a:t>• Fulfillment OTIF rate dropped to 48.2% across core retail accounts.</a:t>
-            </a:r>
-          </a:p>
-          <a:p>
-            <a:pPr>
-              <a:defRPr sz="1300">
+              </a:rPr>
+              <a:t>Recover +$1.04M in net operating profit (+4.2% margin expansion) by eliminating fulfillment penalties.</a:t>
+            </a:r>
+          </a:p>
+          <a:p>
+            <a:r>
+              <a:rPr sz="1200" b="1">
+                <a:solidFill>
+                  <a:srgbClr val="0284C7"/>
+                </a:solidFill>
+              </a:rPr>
+              <a:t>• Restore Retailer Trust: </a:t>
+            </a:r>
+            <a:r>
+              <a:rPr sz="1200" b="0">
                 <a:solidFill>
                   <a:srgbClr val="1E293B"/>
                 </a:solidFill>
-              </a:defRPr>
-            </a:pPr>
-            <a:r>
-              <a:t>• Retailer chargebacks &amp; carrier penalties exceeded $634K annually.</a:t>
-            </a:r>
-          </a:p>
-          <a:p>
-            <a:pPr>
-              <a:defRPr sz="1300">
+              </a:rPr>
+              <a:t>Elevate On-Time In-Full (OTIF) compliance from baseline 48.2% to &gt;92% across major accounts.</a:t>
+            </a:r>
+          </a:p>
+          <a:p>
+            <a:r>
+              <a:rPr sz="1200" b="1">
+                <a:solidFill>
+                  <a:srgbClr val="0284C7"/>
+                </a:solidFill>
+              </a:rPr>
+              <a:t>• Automate Fulfillment Routing: </a:t>
+            </a:r>
+            <a:r>
+              <a:rPr sz="1200" b="0">
                 <a:solidFill>
                   <a:srgbClr val="1E293B"/>
                 </a:solidFill>
-              </a:defRPr>
-            </a:pPr>
-            <a:r>
-              <a:t>• Major accounts impacted: The Home Depot, Lowe's, Menards, Kingfisher, Grainger, Fastenal, Bechtel.</a:t>
-            </a:r>
-          </a:p>
-          <a:p>
-            <a:pPr>
-              <a:defRPr sz="1300">
+              </a:rPr>
+              <a:t>Transition from manual spreadsheet allocation to an automated, profit-optimizing engine with policy guardrails (+50% allocation caps).</a:t>
+            </a:r>
+          </a:p>
+          <a:p>
+            <a:r>
+              <a:rPr sz="1200" b="1">
+                <a:solidFill>
+                  <a:srgbClr val="0284C7"/>
+                </a:solidFill>
+              </a:rPr>
+              <a:t>• Eradicate Chargebacks: </a:t>
+            </a:r>
+            <a:r>
+              <a:rPr sz="1200" b="0">
                 <a:solidFill>
                   <a:srgbClr val="1E293B"/>
                 </a:solidFill>
-              </a:defRPr>
-            </a:pPr>
-            <a:r>
-              <a:t>• Diagnostic objective: Identify root-cause bottlenecks and quantify net margin recovery potential.</a:t>
-            </a:r>
-          </a:p>
-        </p:txBody>
-      </p:sp>
-      <p:sp>
-        <p:nvSpPr>
-          <p:cNvPr id="5" name="Rounded Rectangle 4"/>
+              </a:rPr>
+              <a:t>Eliminate $634K+ in annual retailer penalties and carrier late delivery fines.</a:t>
+            </a:r>
+          </a:p>
+        </p:txBody>
+      </p:sp>
+      <p:sp>
+        <p:nvSpPr>
+          <p:cNvPr id="6" name="Rounded Rectangle 5"/>
           <p:cNvSpPr/>
           <p:nvPr/>
         </p:nvSpPr>
         <p:spPr>
           <a:xfrm>
-            <a:off x="6217920" y="1371600"/>
-            <a:ext cx="5212080" cy="4846320"/>
+            <a:off x="6217920" y="1280160"/>
+            <a:ext cx="5212080" cy="4937760"/>
           </a:xfrm>
           <a:prstGeom prst="roundRect">
             <a:avLst/>
@@ -3452,84 +3572,84 @@
             <a:pPr algn="ctr">
               <a:defRPr sz="1800" b="1">
                 <a:solidFill>
-                  <a:srgbClr val="0F172A"/>
-                </a:solidFill>
-              </a:defRPr>
-            </a:pPr>
-            <a:r>
-              <a:t>Diagnostic Tooling &amp; Capabilities</a:t>
-            </a:r>
-          </a:p>
-          <a:p>
-            <a:pPr>
-              <a:defRPr sz="1300">
-                <a:solidFill>
-                  <a:srgbClr val="0284C7"/>
-                </a:solidFill>
-              </a:defRPr>
-            </a:pPr>
-            <a:r>
-              <a:t>✔  Executive OTIF Summary &amp; Waterfall Bridge Analysis</a:t>
-            </a:r>
-          </a:p>
-          <a:p>
-            <a:pPr>
-              <a:defRPr sz="1300">
-                <a:solidFill>
-                  <a:srgbClr val="0284C7"/>
-                </a:solidFill>
-              </a:defRPr>
-            </a:pPr>
-            <a:r>
-              <a:t>✔  Multi-Timestamp Node SLA Audit Trail (6 Milestones)</a:t>
-            </a:r>
-          </a:p>
-          <a:p>
-            <a:pPr>
-              <a:defRPr sz="1300">
-                <a:solidFill>
-                  <a:srgbClr val="0284C7"/>
-                </a:solidFill>
-              </a:defRPr>
-            </a:pPr>
-            <a:r>
-              <a:t>✔  Carrier Assignment &amp; Penalty Risk Optimizer</a:t>
-            </a:r>
-          </a:p>
-          <a:p>
-            <a:pPr>
-              <a:defRPr sz="1300">
-                <a:solidFill>
-                  <a:srgbClr val="0284C7"/>
-                </a:solidFill>
-              </a:defRPr>
-            </a:pPr>
-            <a:r>
-              <a:t>✔  Order Assignment &amp; Net Margin Engine (Backlog + Guardrails)</a:t>
-            </a:r>
-          </a:p>
-          <a:p>
-            <a:pPr>
-              <a:defRPr sz="1300">
-                <a:solidFill>
-                  <a:srgbClr val="0284C7"/>
-                </a:solidFill>
-              </a:defRPr>
-            </a:pPr>
-            <a:r>
-              <a:t>✔  Timeline Execution Log in Order Book Explorer</a:t>
-            </a:r>
-          </a:p>
-          <a:p>
-            <a:pPr>
-              <a:defRPr sz="1300">
-                <a:solidFill>
-                  <a:srgbClr val="0284C7"/>
-                </a:solidFill>
-              </a:defRPr>
-            </a:pPr>
-            <a:r>
-              <a:t>✔  Scaled Dataset: 800 Order Lines across 13 SKUs &amp; 5 Categories</a:t>
+                  <a:srgbClr val="DC2626"/>
+                </a:solidFill>
+              </a:defRPr>
+            </a:pPr>
+            <a:r>
+              <a:t>⚠️ Current Set of Challenges</a:t>
+            </a:r>
+          </a:p>
+          <a:p>
+            <a:r>
+              <a:rPr sz="1200" b="1">
+                <a:solidFill>
+                  <a:srgbClr val="DC2626"/>
+                </a:solidFill>
+              </a:rPr>
+              <a:t>• Severe OTIF Degradation: </a:t>
+            </a:r>
+            <a:r>
+              <a:rPr sz="1200" b="0">
+                <a:solidFill>
+                  <a:srgbClr val="1E293B"/>
+                </a:solidFill>
+              </a:rPr>
+              <a:t>Baseline OTIF compliance has dropped to 48.2% across Tier-1 retailers (Home Depot, Lowe's, Menards) and industrial accounts.</a:t>
+            </a:r>
+          </a:p>
+          <a:p>
+            <a:r>
+              <a:rPr sz="1200" b="1">
+                <a:solidFill>
+                  <a:srgbClr val="DC2626"/>
+                </a:solidFill>
+              </a:rPr>
+              <a:t>• Compounding Financial Fines: </a:t>
+            </a:r>
+            <a:r>
+              <a:rPr sz="1200" b="0">
+                <a:solidFill>
+                  <a:srgbClr val="1E293B"/>
+                </a:solidFill>
+              </a:rPr>
+              <a:t>$634,632 in annual penalty exposure driven by customer rejections ($450/day fines + 15% line item rejections).</a:t>
+            </a:r>
+          </a:p>
+          <a:p>
+            <a:r>
+              <a:rPr sz="1200" b="1">
+                <a:solidFill>
+                  <a:srgbClr val="DC2626"/>
+                </a:solidFill>
+              </a:rPr>
+              <a:t>• Siloed Network Visibility: </a:t>
+            </a:r>
+            <a:r>
+              <a:rPr sz="1200" b="0">
+                <a:solidFill>
+                  <a:srgbClr val="1E293B"/>
+                </a:solidFill>
+              </a:rPr>
+              <a:t>Zero real-time tracking across 6 operational milestones (Factory -&gt; Ocean -&gt; DC -&gt; Carrier Delivery).</a:t>
+            </a:r>
+          </a:p>
+          <a:p>
+            <a:r>
+              <a:rPr sz="1200" b="1">
+                <a:solidFill>
+                  <a:srgbClr val="DC2626"/>
+                </a:solidFill>
+              </a:rPr>
+              <a:t>• Sub-Optimal Carrier Allocation: </a:t>
+            </a:r>
+            <a:r>
+              <a:rPr sz="1200" b="0">
+                <a:solidFill>
+                  <a:srgbClr val="1E293B"/>
+                </a:solidFill>
+              </a:rPr>
+              <a:t>Carrier selection prioritizes cheap freight rates, inadvertently selecting carriers with high SLA breach rates.</a:t>
             </a:r>
           </a:p>
         </p:txBody>
@@ -3606,7 +3726,7 @@
         <p:spPr>
           <a:xfrm>
             <a:off x="731520" y="137160"/>
-            <a:ext cx="10058400" cy="731520"/>
+            <a:ext cx="10515600" cy="731520"/>
           </a:xfrm>
           <a:prstGeom prst="rect">
             <a:avLst/>
@@ -3627,7 +3747,7 @@
               </a:defRPr>
             </a:pPr>
             <a:r>
-              <a:t>EXECUTIVE SUMMARY DECK</a:t>
+              <a:t>DIY CO. OTIF DIAGNOSTIC &amp; STRATEGY</a:t>
             </a:r>
           </a:p>
           <a:p>
@@ -3639,21 +3759,56 @@
               </a:defRPr>
             </a:pPr>
             <a:r>
-              <a:t>2. OTIF Waterfall Diagnostics &amp; Root-Cause Failure Drivers</a:t>
-            </a:r>
-          </a:p>
-        </p:txBody>
-      </p:sp>
-      <p:sp>
-        <p:nvSpPr>
-          <p:cNvPr id="4" name="Rounded Rectangle 3"/>
+              <a:t>2. DIY's Tooling Gaps &amp; Impact on Executive Decision Making</a:t>
+            </a:r>
+          </a:p>
+        </p:txBody>
+      </p:sp>
+      <p:sp>
+        <p:nvSpPr>
+          <p:cNvPr id="4" name="TextBox 3"/>
+          <p:cNvSpPr txBox="1"/>
+          <p:nvPr/>
+        </p:nvSpPr>
+        <p:spPr>
+          <a:xfrm>
+            <a:off x="731520" y="6400800"/>
+            <a:ext cx="10728655" cy="365760"/>
+          </a:xfrm>
+          <a:prstGeom prst="rect">
+            <a:avLst/>
+          </a:prstGeom>
+          <a:noFill/>
+        </p:spPr>
+        <p:txBody>
+          <a:bodyPr wrap="none">
+            <a:spAutoFit/>
+          </a:bodyPr>
+          <a:lstStyle/>
+          <a:p>
+            <a:pPr>
+              <a:defRPr sz="900">
+                <a:solidFill>
+                  <a:srgbClr val="64748B"/>
+                </a:solidFill>
+              </a:defRPr>
+            </a:pPr>
+            <a:r>
+              <a:t>DIY Home Improvement Co. | Executive OTIF Strategy | Slide 3 of 8</a:t>
+            </a:r>
+          </a:p>
+        </p:txBody>
+      </p:sp>
+      <p:sp>
+        <p:nvSpPr>
+          <p:cNvPr id="5" name="Rounded Rectangle 4"/>
           <p:cNvSpPr/>
           <p:nvPr/>
         </p:nvSpPr>
         <p:spPr>
           <a:xfrm>
-            <a:off x="731520" y="1371600"/>
-            <a:ext cx="2560320" cy="2011680"/>
+            <a:off x="731520" y="1280160"/>
+            <a:ext cx="5120640" cy="2286000"/>
           </a:xfrm>
           <a:prstGeom prst="roundRect">
             <a:avLst/>
@@ -3663,7 +3818,7 @@
           </a:solidFill>
           <a:ln>
             <a:solidFill>
-              <a:srgbClr val="CBD5E1"/>
+              <a:srgbClr val="E2E8F0"/>
             </a:solidFill>
           </a:ln>
         </p:spPr>
@@ -3682,56 +3837,56 @@
           </a:fontRef>
         </p:style>
         <p:txBody>
-          <a:bodyPr rtlCol="0" anchor="ctr" wrap="square" tIns="182880" lIns="182880"/>
+          <a:bodyPr rtlCol="0" anchor="ctr" wrap="square" lIns="228600" tIns="182880"/>
           <a:lstStyle/>
           <a:p>
             <a:pPr algn="ctr">
-              <a:defRPr sz="3200" b="1">
-                <a:solidFill>
-                  <a:srgbClr val="DC2626"/>
-                </a:solidFill>
-              </a:defRPr>
-            </a:pPr>
-            <a:r>
-              <a:t>42.1%</a:t>
-            </a:r>
-          </a:p>
-          <a:p>
-            <a:pPr>
-              <a:defRPr sz="1300" b="1">
+              <a:defRPr sz="1400" b="1">
                 <a:solidFill>
                   <a:srgbClr val="0F172A"/>
                 </a:solidFill>
               </a:defRPr>
             </a:pPr>
             <a:r>
-              <a:t>Customer Dock Rejection</a:t>
+              <a:t>Gap 1: Missing Multi-Timestamp Audit Trail</a:t>
             </a:r>
           </a:p>
           <a:p>
             <a:pPr>
               <a:defRPr sz="1100">
                 <a:solidFill>
-                  <a:srgbClr val="64748B"/>
-                </a:solidFill>
-              </a:defRPr>
-            </a:pPr>
-            <a:r>
-              <a:t>Damage &amp; Barcode/ASN Mismatch</a:t>
-            </a:r>
-          </a:p>
-        </p:txBody>
-      </p:sp>
-      <p:sp>
-        <p:nvSpPr>
-          <p:cNvPr id="5" name="Rounded Rectangle 4"/>
+                  <a:srgbClr val="1E293B"/>
+                </a:solidFill>
+              </a:defRPr>
+            </a:pPr>
+            <a:r>
+              <a:t>• Tooling Deficit: No end-to-end milestone tracking across Factory Planned, Actual Dispatch, Ocean Departure, DC Arrival, and Carrier Delivery SLA windows.</a:t>
+            </a:r>
+          </a:p>
+          <a:p>
+            <a:pPr>
+              <a:defRPr sz="1100" b="1">
+                <a:solidFill>
+                  <a:srgbClr val="D97706"/>
+                </a:solidFill>
+              </a:defRPr>
+            </a:pPr>
+            <a:r>
+              <a:t>• Decision Impact: Impact: Management cannot identify whether OTIF drops stem from plant delays, port congestion, or carrier transit failures.</a:t>
+            </a:r>
+          </a:p>
+        </p:txBody>
+      </p:sp>
+      <p:sp>
+        <p:nvSpPr>
+          <p:cNvPr id="6" name="Rounded Rectangle 5"/>
           <p:cNvSpPr/>
           <p:nvPr/>
         </p:nvSpPr>
         <p:spPr>
           <a:xfrm>
-            <a:off x="3429000" y="1371600"/>
-            <a:ext cx="2560320" cy="2011680"/>
+            <a:off x="6126480" y="1280160"/>
+            <a:ext cx="5120640" cy="2286000"/>
           </a:xfrm>
           <a:prstGeom prst="roundRect">
             <a:avLst/>
@@ -3741,7 +3896,7 @@
           </a:solidFill>
           <a:ln>
             <a:solidFill>
-              <a:srgbClr val="CBD5E1"/>
+              <a:srgbClr val="E2E8F0"/>
             </a:solidFill>
           </a:ln>
         </p:spPr>
@@ -3760,56 +3915,56 @@
           </a:fontRef>
         </p:style>
         <p:txBody>
-          <a:bodyPr rtlCol="0" anchor="ctr" wrap="square" tIns="182880" lIns="182880"/>
+          <a:bodyPr rtlCol="0" anchor="ctr" wrap="square" lIns="228600" tIns="182880"/>
           <a:lstStyle/>
           <a:p>
             <a:pPr algn="ctr">
-              <a:defRPr sz="3200" b="1">
-                <a:solidFill>
-                  <a:srgbClr val="DC2626"/>
-                </a:solidFill>
-              </a:defRPr>
-            </a:pPr>
-            <a:r>
-              <a:t>34.8%</a:t>
-            </a:r>
-          </a:p>
-          <a:p>
-            <a:pPr>
-              <a:defRPr sz="1300" b="1">
+              <a:defRPr sz="1400" b="1">
                 <a:solidFill>
                   <a:srgbClr val="0F172A"/>
                 </a:solidFill>
               </a:defRPr>
             </a:pPr>
             <a:r>
-              <a:t>Logistics SLA Delay</a:t>
+              <a:t>Gap 2: Static Spreadsheet Allocation</a:t>
             </a:r>
           </a:p>
           <a:p>
             <a:pPr>
               <a:defRPr sz="1100">
                 <a:solidFill>
-                  <a:srgbClr val="64748B"/>
-                </a:solidFill>
-              </a:defRPr>
-            </a:pPr>
-            <a:r>
-              <a:t>Carrier Transit Window Failures</a:t>
-            </a:r>
-          </a:p>
-        </p:txBody>
-      </p:sp>
-      <p:sp>
-        <p:nvSpPr>
-          <p:cNvPr id="6" name="Rounded Rectangle 5"/>
+                  <a:srgbClr val="1E293B"/>
+                </a:solidFill>
+              </a:defRPr>
+            </a:pPr>
+            <a:r>
+              <a:t>• Tooling Deficit: Order allocation and carrier selection are executed using legacy, static Excel models lacking optimization algorithms.</a:t>
+            </a:r>
+          </a:p>
+          <a:p>
+            <a:pPr>
+              <a:defRPr sz="1100" b="1">
+                <a:solidFill>
+                  <a:srgbClr val="D97706"/>
+                </a:solidFill>
+              </a:defRPr>
+            </a:pPr>
+            <a:r>
+              <a:t>• Decision Impact: Impact: Logistics planners manually assign orders without evaluating carrier penalty risk vs freight shipping costs.</a:t>
+            </a:r>
+          </a:p>
+        </p:txBody>
+      </p:sp>
+      <p:sp>
+        <p:nvSpPr>
+          <p:cNvPr id="7" name="Rounded Rectangle 6"/>
           <p:cNvSpPr/>
           <p:nvPr/>
         </p:nvSpPr>
         <p:spPr>
           <a:xfrm>
-            <a:off x="6126480" y="1371600"/>
-            <a:ext cx="2560320" cy="2011680"/>
+            <a:off x="731520" y="3749039"/>
+            <a:ext cx="5120640" cy="2286000"/>
           </a:xfrm>
           <a:prstGeom prst="roundRect">
             <a:avLst/>
@@ -3819,7 +3974,7 @@
           </a:solidFill>
           <a:ln>
             <a:solidFill>
-              <a:srgbClr val="CBD5E1"/>
+              <a:srgbClr val="E2E8F0"/>
             </a:solidFill>
           </a:ln>
         </p:spPr>
@@ -3838,56 +3993,56 @@
           </a:fontRef>
         </p:style>
         <p:txBody>
-          <a:bodyPr rtlCol="0" anchor="ctr" wrap="square" tIns="182880" lIns="182880"/>
+          <a:bodyPr rtlCol="0" anchor="ctr" wrap="square" lIns="228600" tIns="182880"/>
           <a:lstStyle/>
           <a:p>
             <a:pPr algn="ctr">
-              <a:defRPr sz="3200" b="1">
-                <a:solidFill>
-                  <a:srgbClr val="0284C7"/>
-                </a:solidFill>
-              </a:defRPr>
-            </a:pPr>
-            <a:r>
-              <a:t>14.6%</a:t>
-            </a:r>
-          </a:p>
-          <a:p>
-            <a:pPr>
-              <a:defRPr sz="1300" b="1">
+              <a:defRPr sz="1400" b="1">
                 <a:solidFill>
                   <a:srgbClr val="0F172A"/>
                 </a:solidFill>
               </a:defRPr>
             </a:pPr>
             <a:r>
-              <a:t>DC Inventory Stockout</a:t>
+              <a:t>Gap 3: Lack of Policy Guardrails &amp; Backlog Rules</a:t>
             </a:r>
           </a:p>
           <a:p>
             <a:pPr>
               <a:defRPr sz="1100">
                 <a:solidFill>
-                  <a:srgbClr val="64748B"/>
-                </a:solidFill>
-              </a:defRPr>
-            </a:pPr>
-            <a:r>
-              <a:t>Safety Stock Allocation Deficits</a:t>
-            </a:r>
-          </a:p>
-        </p:txBody>
-      </p:sp>
-      <p:sp>
-        <p:nvSpPr>
-          <p:cNvPr id="7" name="Rounded Rectangle 6"/>
+                  <a:srgbClr val="1E293B"/>
+                </a:solidFill>
+              </a:defRPr>
+            </a:pPr>
+            <a:r>
+              <a:t>• Tooling Deficit: No automated controls to enforce allocation caps (+50% max order allocation) or integrate future backlog demand.</a:t>
+            </a:r>
+          </a:p>
+          <a:p>
+            <a:pPr>
+              <a:defRPr sz="1100" b="1">
+                <a:solidFill>
+                  <a:srgbClr val="D97706"/>
+                </a:solidFill>
+              </a:defRPr>
+            </a:pPr>
+            <a:r>
+              <a:t>• Decision Impact: Impact: Inventory gets over-allocated to low-margin accounts while high-penalty retail orders suffer stockouts.</a:t>
+            </a:r>
+          </a:p>
+        </p:txBody>
+      </p:sp>
+      <p:sp>
+        <p:nvSpPr>
+          <p:cNvPr id="8" name="Rounded Rectangle 7"/>
           <p:cNvSpPr/>
           <p:nvPr/>
         </p:nvSpPr>
         <p:spPr>
           <a:xfrm>
-            <a:off x="8823960" y="1371600"/>
-            <a:ext cx="2560320" cy="2011680"/>
+            <a:off x="6126480" y="3749039"/>
+            <a:ext cx="5120640" cy="2286000"/>
           </a:xfrm>
           <a:prstGeom prst="roundRect">
             <a:avLst/>
@@ -3897,7 +4052,7 @@
           </a:solidFill>
           <a:ln>
             <a:solidFill>
-              <a:srgbClr val="CBD5E1"/>
+              <a:srgbClr val="E2E8F0"/>
             </a:solidFill>
           </a:ln>
         </p:spPr>
@@ -3916,144 +4071,42 @@
           </a:fontRef>
         </p:style>
         <p:txBody>
-          <a:bodyPr rtlCol="0" anchor="ctr" wrap="square" tIns="182880" lIns="182880"/>
+          <a:bodyPr rtlCol="0" anchor="ctr" wrap="square" lIns="228600" tIns="182880"/>
           <a:lstStyle/>
           <a:p>
             <a:pPr algn="ctr">
-              <a:defRPr sz="3200" b="1">
+              <a:defRPr sz="1400" b="1">
                 <a:solidFill>
                   <a:srgbClr val="0F172A"/>
                 </a:solidFill>
               </a:defRPr>
             </a:pPr>
             <a:r>
-              <a:t>8.5%</a:t>
-            </a:r>
-          </a:p>
-          <a:p>
-            <a:pPr>
-              <a:defRPr sz="1300" b="1">
-                <a:solidFill>
-                  <a:srgbClr val="0F172A"/>
-                </a:solidFill>
-              </a:defRPr>
-            </a:pPr>
-            <a:r>
-              <a:t>Factory Lead Time Overrun</a:t>
+              <a:t>Gap 4: Reactive Fire-Fighting vs Prescriptive Analytics</a:t>
             </a:r>
           </a:p>
           <a:p>
             <a:pPr>
               <a:defRPr sz="1100">
                 <a:solidFill>
-                  <a:srgbClr val="64748B"/>
-                </a:solidFill>
-              </a:defRPr>
-            </a:pPr>
-            <a:r>
-              <a:t>Tier-1 Component Lead Delays</a:t>
-            </a:r>
-          </a:p>
-        </p:txBody>
-      </p:sp>
-      <p:sp>
-        <p:nvSpPr>
-          <p:cNvPr id="8" name="Rectangle 7"/>
-          <p:cNvSpPr/>
-          <p:nvPr/>
-        </p:nvSpPr>
-        <p:spPr>
-          <a:xfrm>
-            <a:off x="731520" y="3657600"/>
-            <a:ext cx="10698480" cy="2560320"/>
-          </a:xfrm>
-          <a:prstGeom prst="rect">
-            <a:avLst/>
-          </a:prstGeom>
-          <a:solidFill>
-            <a:srgbClr val="FFFFFF"/>
-          </a:solidFill>
-          <a:ln>
-            <a:solidFill>
-              <a:srgbClr val="E2E8F0"/>
-            </a:solidFill>
-          </a:ln>
-        </p:spPr>
-        <p:style>
-          <a:lnRef idx="1">
-            <a:schemeClr val="accent1"/>
-          </a:lnRef>
-          <a:fillRef idx="3">
-            <a:schemeClr val="accent1"/>
-          </a:fillRef>
-          <a:effectRef idx="2">
-            <a:schemeClr val="accent1"/>
-          </a:effectRef>
-          <a:fontRef idx="minor">
-            <a:schemeClr val="lt1"/>
-          </a:fontRef>
-        </p:style>
-        <p:txBody>
-          <a:bodyPr rtlCol="0" anchor="ctr" wrap="square" lIns="274320" tIns="182880"/>
-          <a:lstStyle/>
-          <a:p>
-            <a:pPr algn="ctr">
-              <a:defRPr sz="1600" b="1">
-                <a:solidFill>
-                  <a:srgbClr val="0F172A"/>
-                </a:solidFill>
-              </a:defRPr>
-            </a:pPr>
-            <a:r>
-              <a:t>Major Customer Penalty Exposure Summary</a:t>
-            </a:r>
-          </a:p>
-          <a:p>
-            <a:pPr>
-              <a:defRPr sz="1200">
-                <a:solidFill>
                   <a:srgbClr val="1E293B"/>
                 </a:solidFill>
               </a:defRPr>
             </a:pPr>
             <a:r>
-              <a:t>• The Home Depot (US East / West): $245,200 penalty loss • 2-day delivery SLA window • High penalty rate ($450/day + 15% reject fine)</a:t>
-            </a:r>
-          </a:p>
-          <a:p>
-            <a:pPr>
-              <a:defRPr sz="1200">
-                <a:solidFill>
-                  <a:srgbClr val="1E293B"/>
-                </a:solidFill>
-              </a:defRPr>
-            </a:pPr>
-            <a:r>
-              <a:t>• Lowe's Companies (US East): $182,400 penalty loss • 2-day delivery SLA window • Barcode mismatch on dock arrival</a:t>
-            </a:r>
-          </a:p>
-          <a:p>
-            <a:pPr>
-              <a:defRPr sz="1200">
-                <a:solidFill>
-                  <a:srgbClr val="1E293B"/>
-                </a:solidFill>
-              </a:defRPr>
-            </a:pPr>
-            <a:r>
-              <a:t>• Kingfisher Group (EU): $112,850 penalty loss • 3-day EU gateway SLA window • Transit damage on ocean containers</a:t>
-            </a:r>
-          </a:p>
-          <a:p>
-            <a:pPr>
-              <a:defRPr sz="1200">
-                <a:solidFill>
-                  <a:srgbClr val="1E293B"/>
-                </a:solidFill>
-              </a:defRPr>
-            </a:pPr>
-            <a:r>
-              <a:t>• Industrial Accounts (Grainger, Fastenal, Bechtel): $94,182 penalty loss • 4-5 day SLA window • Carrier route delays</a:t>
+              <a:t>• Tooling Deficit: Tooling reports SLA failures after customer fines are billed, rather than predicting breaches before dispatch.</a:t>
+            </a:r>
+          </a:p>
+          <a:p>
+            <a:pPr>
+              <a:defRPr sz="1100" b="1">
+                <a:solidFill>
+                  <a:srgbClr val="D97706"/>
+                </a:solidFill>
+              </a:defRPr>
+            </a:pPr>
+            <a:r>
+              <a:t>• Decision Impact: Impact: Decision-makers operate in hindsight, unable to re-route high-risk orders to express freight lines.</a:t>
             </a:r>
           </a:p>
         </p:txBody>
@@ -4130,7 +4183,7 @@
         <p:spPr>
           <a:xfrm>
             <a:off x="731520" y="137160"/>
-            <a:ext cx="10058400" cy="731520"/>
+            <a:ext cx="10515600" cy="731520"/>
           </a:xfrm>
           <a:prstGeom prst="rect">
             <a:avLst/>
@@ -4151,7 +4204,7 @@
               </a:defRPr>
             </a:pPr>
             <a:r>
-              <a:t>EXECUTIVE SUMMARY DECK</a:t>
+              <a:t>DIY CO. OTIF DIAGNOSTIC &amp; STRATEGY</a:t>
             </a:r>
           </a:p>
           <a:p>
@@ -4163,21 +4216,56 @@
               </a:defRPr>
             </a:pPr>
             <a:r>
-              <a:t>3. Order Assignment &amp; Net Profit Margin Engine</a:t>
-            </a:r>
-          </a:p>
-        </p:txBody>
-      </p:sp>
-      <p:sp>
-        <p:nvSpPr>
-          <p:cNvPr id="4" name="Rounded Rectangle 3"/>
+              <a:t>3. Root-Cause Failure Drivers Causing OTIF Drops</a:t>
+            </a:r>
+          </a:p>
+        </p:txBody>
+      </p:sp>
+      <p:sp>
+        <p:nvSpPr>
+          <p:cNvPr id="4" name="TextBox 3"/>
+          <p:cNvSpPr txBox="1"/>
+          <p:nvPr/>
+        </p:nvSpPr>
+        <p:spPr>
+          <a:xfrm>
+            <a:off x="731520" y="6400800"/>
+            <a:ext cx="10728655" cy="365760"/>
+          </a:xfrm>
+          <a:prstGeom prst="rect">
+            <a:avLst/>
+          </a:prstGeom>
+          <a:noFill/>
+        </p:spPr>
+        <p:txBody>
+          <a:bodyPr wrap="none">
+            <a:spAutoFit/>
+          </a:bodyPr>
+          <a:lstStyle/>
+          <a:p>
+            <a:pPr>
+              <a:defRPr sz="900">
+                <a:solidFill>
+                  <a:srgbClr val="64748B"/>
+                </a:solidFill>
+              </a:defRPr>
+            </a:pPr>
+            <a:r>
+              <a:t>DIY Home Improvement Co. | Executive OTIF Strategy | Slide 4 of 8</a:t>
+            </a:r>
+          </a:p>
+        </p:txBody>
+      </p:sp>
+      <p:sp>
+        <p:nvSpPr>
+          <p:cNvPr id="5" name="Rounded Rectangle 4"/>
           <p:cNvSpPr/>
           <p:nvPr/>
         </p:nvSpPr>
         <p:spPr>
           <a:xfrm>
-            <a:off x="731520" y="1371600"/>
-            <a:ext cx="5120640" cy="4846320"/>
+            <a:off x="731520" y="1280160"/>
+            <a:ext cx="2560320" cy="2194560"/>
           </a:xfrm>
           <a:prstGeom prst="roundRect">
             <a:avLst/>
@@ -4187,7 +4275,7 @@
           </a:solidFill>
           <a:ln>
             <a:solidFill>
-              <a:srgbClr val="CBD5E1"/>
+              <a:srgbClr val="E2E8F0"/>
             </a:solidFill>
           </a:ln>
         </p:spPr>
@@ -4206,94 +4294,292 @@
           </a:fontRef>
         </p:style>
         <p:txBody>
-          <a:bodyPr rtlCol="0" anchor="ctr" wrap="square" lIns="274320" tIns="274320"/>
+          <a:bodyPr rtlCol="0" anchor="ctr" wrap="square" tIns="182880" lIns="182880"/>
           <a:lstStyle/>
           <a:p>
             <a:pPr algn="ctr">
-              <a:defRPr sz="1800" b="1">
+              <a:defRPr sz="3200" b="1">
+                <a:solidFill>
+                  <a:srgbClr val="DC2626"/>
+                </a:solidFill>
+              </a:defRPr>
+            </a:pPr>
+            <a:r>
+              <a:t>42.1%</a:t>
+            </a:r>
+          </a:p>
+          <a:p>
+            <a:pPr>
+              <a:defRPr sz="1300" b="1">
                 <a:solidFill>
                   <a:srgbClr val="0F172A"/>
                 </a:solidFill>
               </a:defRPr>
             </a:pPr>
             <a:r>
-              <a:t>Optimization Rules &amp; Guardrails</a:t>
-            </a:r>
-          </a:p>
-          <a:p>
-            <a:pPr>
-              <a:defRPr sz="1200">
-                <a:solidFill>
-                  <a:srgbClr val="1E293B"/>
-                </a:solidFill>
-              </a:defRPr>
-            </a:pPr>
-            <a:r>
-              <a:t>✔ Flexible SKU Line Items: Choose any SKU from the order catalog.</a:t>
-            </a:r>
-          </a:p>
-          <a:p>
-            <a:pPr>
-              <a:defRPr sz="1200">
-                <a:solidFill>
-                  <a:srgbClr val="1E293B"/>
-                </a:solidFill>
-              </a:defRPr>
-            </a:pPr>
-            <a:r>
-              <a:t>✔ SLA Auto-Population: Customer SLA delivery date auto-populates upon customer selection.</a:t>
-            </a:r>
-          </a:p>
-          <a:p>
-            <a:pPr>
-              <a:defRPr sz="1200">
-                <a:solidFill>
-                  <a:srgbClr val="1E293B"/>
-                </a:solidFill>
-              </a:defRPr>
-            </a:pPr>
-            <a:r>
-              <a:t>✔ Future Order Backlog Integration: Pre-loads future backlog orders into optimizer.</a:t>
-            </a:r>
-          </a:p>
-          <a:p>
-            <a:pPr>
-              <a:defRPr sz="1200">
-                <a:solidFill>
-                  <a:srgbClr val="1E293B"/>
-                </a:solidFill>
-              </a:defRPr>
-            </a:pPr>
-            <a:r>
-              <a:t>✔ Fulfillment Policy Caps: Enforces max +50% allocation guardrails beyond order requirements.</a:t>
-            </a:r>
-          </a:p>
-          <a:p>
-            <a:pPr>
-              <a:defRPr sz="1200">
-                <a:solidFill>
-                  <a:srgbClr val="1E293B"/>
-                </a:solidFill>
-              </a:defRPr>
-            </a:pPr>
-            <a:r>
-              <a:t>✔ Path Evaluation: Evaluates Shenzhen vs Vietnam factories, Atlanta/Inland/Rotterdam DCs, and dedicated carriers.</a:t>
-            </a:r>
-          </a:p>
-        </p:txBody>
-      </p:sp>
-      <p:sp>
-        <p:nvSpPr>
-          <p:cNvPr id="5" name="Rounded Rectangle 4"/>
+              <a:t>Customer Dock Rejections</a:t>
+            </a:r>
+          </a:p>
+          <a:p>
+            <a:pPr>
+              <a:defRPr sz="1100">
+                <a:solidFill>
+                  <a:srgbClr val="64748B"/>
+                </a:solidFill>
+              </a:defRPr>
+            </a:pPr>
+            <a:r>
+              <a:t>Packaging damage, incorrect ASN documentation, and barcode scanning mismatches at retailer receiving docks.</a:t>
+            </a:r>
+          </a:p>
+        </p:txBody>
+      </p:sp>
+      <p:sp>
+        <p:nvSpPr>
+          <p:cNvPr id="6" name="Rounded Rectangle 5"/>
           <p:cNvSpPr/>
           <p:nvPr/>
         </p:nvSpPr>
         <p:spPr>
           <a:xfrm>
-            <a:off x="6217920" y="1371600"/>
-            <a:ext cx="5212080" cy="4846320"/>
+            <a:off x="3429000" y="1280160"/>
+            <a:ext cx="2560320" cy="2194560"/>
           </a:xfrm>
           <a:prstGeom prst="roundRect">
+            <a:avLst/>
+          </a:prstGeom>
+          <a:solidFill>
+            <a:srgbClr val="F8FAFC"/>
+          </a:solidFill>
+          <a:ln>
+            <a:solidFill>
+              <a:srgbClr val="E2E8F0"/>
+            </a:solidFill>
+          </a:ln>
+        </p:spPr>
+        <p:style>
+          <a:lnRef idx="1">
+            <a:schemeClr val="accent1"/>
+          </a:lnRef>
+          <a:fillRef idx="3">
+            <a:schemeClr val="accent1"/>
+          </a:fillRef>
+          <a:effectRef idx="2">
+            <a:schemeClr val="accent1"/>
+          </a:effectRef>
+          <a:fontRef idx="minor">
+            <a:schemeClr val="lt1"/>
+          </a:fontRef>
+        </p:style>
+        <p:txBody>
+          <a:bodyPr rtlCol="0" anchor="ctr" wrap="square" tIns="182880" lIns="182880"/>
+          <a:lstStyle/>
+          <a:p>
+            <a:pPr algn="ctr">
+              <a:defRPr sz="3200" b="1">
+                <a:solidFill>
+                  <a:srgbClr val="DC2626"/>
+                </a:solidFill>
+              </a:defRPr>
+            </a:pPr>
+            <a:r>
+              <a:t>34.8%</a:t>
+            </a:r>
+          </a:p>
+          <a:p>
+            <a:pPr>
+              <a:defRPr sz="1300" b="1">
+                <a:solidFill>
+                  <a:srgbClr val="0F172A"/>
+                </a:solidFill>
+              </a:defRPr>
+            </a:pPr>
+            <a:r>
+              <a:t>Logistics &amp; Carrier Delays</a:t>
+            </a:r>
+          </a:p>
+          <a:p>
+            <a:pPr>
+              <a:defRPr sz="1100">
+                <a:solidFill>
+                  <a:srgbClr val="64748B"/>
+                </a:solidFill>
+              </a:defRPr>
+            </a:pPr>
+            <a:r>
+              <a:t>Carrier transit window breaches, port ocean delays, and customs clearance holds across international gateways.</a:t>
+            </a:r>
+          </a:p>
+        </p:txBody>
+      </p:sp>
+      <p:sp>
+        <p:nvSpPr>
+          <p:cNvPr id="7" name="Rounded Rectangle 6"/>
+          <p:cNvSpPr/>
+          <p:nvPr/>
+        </p:nvSpPr>
+        <p:spPr>
+          <a:xfrm>
+            <a:off x="6126480" y="1280160"/>
+            <a:ext cx="2560320" cy="2194560"/>
+          </a:xfrm>
+          <a:prstGeom prst="roundRect">
+            <a:avLst/>
+          </a:prstGeom>
+          <a:solidFill>
+            <a:srgbClr val="F8FAFC"/>
+          </a:solidFill>
+          <a:ln>
+            <a:solidFill>
+              <a:srgbClr val="E2E8F0"/>
+            </a:solidFill>
+          </a:ln>
+        </p:spPr>
+        <p:style>
+          <a:lnRef idx="1">
+            <a:schemeClr val="accent1"/>
+          </a:lnRef>
+          <a:fillRef idx="3">
+            <a:schemeClr val="accent1"/>
+          </a:fillRef>
+          <a:effectRef idx="2">
+            <a:schemeClr val="accent1"/>
+          </a:effectRef>
+          <a:fontRef idx="minor">
+            <a:schemeClr val="lt1"/>
+          </a:fontRef>
+        </p:style>
+        <p:txBody>
+          <a:bodyPr rtlCol="0" anchor="ctr" wrap="square" tIns="182880" lIns="182880"/>
+          <a:lstStyle/>
+          <a:p>
+            <a:pPr algn="ctr">
+              <a:defRPr sz="3200" b="1">
+                <a:solidFill>
+                  <a:srgbClr val="D97706"/>
+                </a:solidFill>
+              </a:defRPr>
+            </a:pPr>
+            <a:r>
+              <a:t>14.6%</a:t>
+            </a:r>
+          </a:p>
+          <a:p>
+            <a:pPr>
+              <a:defRPr sz="1300" b="1">
+                <a:solidFill>
+                  <a:srgbClr val="0F172A"/>
+                </a:solidFill>
+              </a:defRPr>
+            </a:pPr>
+            <a:r>
+              <a:t>DC Out of Stock</a:t>
+            </a:r>
+          </a:p>
+          <a:p>
+            <a:pPr>
+              <a:defRPr sz="1100">
+                <a:solidFill>
+                  <a:srgbClr val="64748B"/>
+                </a:solidFill>
+              </a:defRPr>
+            </a:pPr>
+            <a:r>
+              <a:t>Misallocated safety stock and inventory deficits across regional DCs (Atlanta, Inland Empire, Rotterdam).</a:t>
+            </a:r>
+          </a:p>
+        </p:txBody>
+      </p:sp>
+      <p:sp>
+        <p:nvSpPr>
+          <p:cNvPr id="8" name="Rounded Rectangle 7"/>
+          <p:cNvSpPr/>
+          <p:nvPr/>
+        </p:nvSpPr>
+        <p:spPr>
+          <a:xfrm>
+            <a:off x="8823960" y="1280160"/>
+            <a:ext cx="2560320" cy="2194560"/>
+          </a:xfrm>
+          <a:prstGeom prst="roundRect">
+            <a:avLst/>
+          </a:prstGeom>
+          <a:solidFill>
+            <a:srgbClr val="F8FAFC"/>
+          </a:solidFill>
+          <a:ln>
+            <a:solidFill>
+              <a:srgbClr val="E2E8F0"/>
+            </a:solidFill>
+          </a:ln>
+        </p:spPr>
+        <p:style>
+          <a:lnRef idx="1">
+            <a:schemeClr val="accent1"/>
+          </a:lnRef>
+          <a:fillRef idx="3">
+            <a:schemeClr val="accent1"/>
+          </a:fillRef>
+          <a:effectRef idx="2">
+            <a:schemeClr val="accent1"/>
+          </a:effectRef>
+          <a:fontRef idx="minor">
+            <a:schemeClr val="lt1"/>
+          </a:fontRef>
+        </p:style>
+        <p:txBody>
+          <a:bodyPr rtlCol="0" anchor="ctr" wrap="square" tIns="182880" lIns="182880"/>
+          <a:lstStyle/>
+          <a:p>
+            <a:pPr algn="ctr">
+              <a:defRPr sz="3200" b="1">
+                <a:solidFill>
+                  <a:srgbClr val="0F172A"/>
+                </a:solidFill>
+              </a:defRPr>
+            </a:pPr>
+            <a:r>
+              <a:t>8.5%</a:t>
+            </a:r>
+          </a:p>
+          <a:p>
+            <a:pPr>
+              <a:defRPr sz="1300" b="1">
+                <a:solidFill>
+                  <a:srgbClr val="0F172A"/>
+                </a:solidFill>
+              </a:defRPr>
+            </a:pPr>
+            <a:r>
+              <a:t>Factory Lead Overruns</a:t>
+            </a:r>
+          </a:p>
+          <a:p>
+            <a:pPr>
+              <a:defRPr sz="1100">
+                <a:solidFill>
+                  <a:srgbClr val="64748B"/>
+                </a:solidFill>
+              </a:defRPr>
+            </a:pPr>
+            <a:r>
+              <a:t>Upstream component delays (lithium batteries, gears, motors) at Shenzhen and Vietnam manufacturing plants.</a:t>
+            </a:r>
+          </a:p>
+        </p:txBody>
+      </p:sp>
+      <p:sp>
+        <p:nvSpPr>
+          <p:cNvPr id="9" name="Rectangle 8"/>
+          <p:cNvSpPr/>
+          <p:nvPr/>
+        </p:nvSpPr>
+        <p:spPr>
+          <a:xfrm>
+            <a:off x="731520" y="3749039"/>
+            <a:ext cx="10698480" cy="2468880"/>
+          </a:xfrm>
+          <a:prstGeom prst="rect">
             <a:avLst/>
           </a:prstGeom>
           <a:solidFill>
@@ -4320,103 +4606,66 @@
           </a:fontRef>
         </p:style>
         <p:txBody>
-          <a:bodyPr rtlCol="0" anchor="ctr" wrap="square" lIns="365760" tIns="365760"/>
+          <a:bodyPr rtlCol="0" anchor="ctr" wrap="square" lIns="274320" tIns="228600"/>
           <a:lstStyle/>
           <a:p>
             <a:pPr algn="ctr">
-              <a:defRPr sz="1200" b="1">
+              <a:defRPr sz="1300" b="1">
                 <a:solidFill>
                   <a:srgbClr val="0284C7"/>
                 </a:solidFill>
               </a:defRPr>
             </a:pPr>
             <a:r>
-              <a:t>TOTAL PORTFOLIO PROFIT LIFT</a:t>
-            </a:r>
-          </a:p>
-          <a:p>
-            <a:pPr>
-              <a:defRPr sz="4000" b="1">
-                <a:solidFill>
-                  <a:srgbClr val="16A34A"/>
-                </a:solidFill>
-              </a:defRPr>
-            </a:pPr>
-            <a:r>
-              <a:t>+$1,040,117.82</a:t>
-            </a:r>
-          </a:p>
-          <a:p>
-            <a:pPr>
-              <a:defRPr sz="1600" b="1">
+              <a:t>QUANTIFIED ANNUAL PENALTY LOSS BREAKDOWN BY ACCOUNT TIER</a:t>
+            </a:r>
+          </a:p>
+          <a:p>
+            <a:pPr>
+              <a:defRPr sz="1100">
                 <a:solidFill>
                   <a:srgbClr val="FFFFFF"/>
                 </a:solidFill>
               </a:defRPr>
             </a:pPr>
             <a:r>
-              <a:t>+4.2% Net Margin Expansion (43.7% ➔ 45.6%)</a:t>
-            </a:r>
-          </a:p>
-          <a:p/>
-          <a:p>
-            <a:pPr>
-              <a:defRPr sz="1200">
-                <a:solidFill>
-                  <a:srgbClr val="CBD5E1"/>
-                </a:solidFill>
-              </a:defRPr>
-            </a:pPr>
-            <a:r>
-              <a:t>Total Revenue Base: $55,984,370.00</a:t>
-            </a:r>
-          </a:p>
-          <a:p>
-            <a:pPr>
-              <a:defRPr sz="1200">
-                <a:solidFill>
-                  <a:srgbClr val="CBD5E1"/>
-                </a:solidFill>
-              </a:defRPr>
-            </a:pPr>
-            <a:r>
-              <a:t>Manufacturing Cost: $24,361,855.20</a:t>
-            </a:r>
-          </a:p>
-          <a:p>
-            <a:pPr>
-              <a:defRPr sz="1200">
-                <a:solidFill>
-                  <a:srgbClr val="CBD5E1"/>
-                </a:solidFill>
-              </a:defRPr>
-            </a:pPr>
-            <a:r>
-              <a:t>Freight Shipping Cost: $6,496,494.72</a:t>
-            </a:r>
-          </a:p>
-          <a:p>
-            <a:pPr>
-              <a:defRPr sz="1200">
-                <a:solidFill>
-                  <a:srgbClr val="CBD5E1"/>
-                </a:solidFill>
-              </a:defRPr>
-            </a:pPr>
-            <a:r>
-              <a:t>Baseline Penalties Loss: $634,632.00</a:t>
-            </a:r>
-          </a:p>
-          <a:p>
-            <a:pPr>
-              <a:defRPr sz="1200">
-                <a:solidFill>
-                  <a:srgbClr val="CBD5E1"/>
-                </a:solidFill>
-              </a:defRPr>
-            </a:pPr>
-            <a:r>
-              <a:t>Optimized Penalty Loss: $114,233.76 (82% Reduction)</a:t>
+              <a:t>• The Home Depot (US East / West): $245,200 annual fines • 2-day delivery SLA window • $450/day late fee + 15% dock rejection chargeback.</a:t>
+            </a:r>
+          </a:p>
+          <a:p>
+            <a:pPr>
+              <a:defRPr sz="1100">
+                <a:solidFill>
+                  <a:srgbClr val="FFFFFF"/>
+                </a:solidFill>
+              </a:defRPr>
+            </a:pPr>
+            <a:r>
+              <a:t>• Lowe's Companies (US East): $182,400 annual fines • 2-day delivery SLA window • Barcode &amp; ASN documentation mismatches.</a:t>
+            </a:r>
+          </a:p>
+          <a:p>
+            <a:pPr>
+              <a:defRPr sz="1100">
+                <a:solidFill>
+                  <a:srgbClr val="FFFFFF"/>
+                </a:solidFill>
+              </a:defRPr>
+            </a:pPr>
+            <a:r>
+              <a:t>• Kingfisher Group (EU Gateway): $112,850 annual fines • 3-day delivery SLA window • Ocean container transit delays.</a:t>
+            </a:r>
+          </a:p>
+          <a:p>
+            <a:pPr>
+              <a:defRPr sz="1100">
+                <a:solidFill>
+                  <a:srgbClr val="FFFFFF"/>
+                </a:solidFill>
+              </a:defRPr>
+            </a:pPr>
+            <a:r>
+              <a:t>• Industrial Accounts (Grainger, Fastenal, Bechtel): $94,182 annual fines • 4-5 day SLA window • Regional carrier routing delays.</a:t>
             </a:r>
           </a:p>
         </p:txBody>
@@ -4493,7 +4742,7 @@
         <p:spPr>
           <a:xfrm>
             <a:off x="731520" y="137160"/>
-            <a:ext cx="10058400" cy="731520"/>
+            <a:ext cx="10515600" cy="731520"/>
           </a:xfrm>
           <a:prstGeom prst="rect">
             <a:avLst/>
@@ -4514,7 +4763,7 @@
               </a:defRPr>
             </a:pPr>
             <a:r>
-              <a:t>EXECUTIVE SUMMARY DECK</a:t>
+              <a:t>DIY CO. OTIF DIAGNOSTIC &amp; STRATEGY</a:t>
             </a:r>
           </a:p>
           <a:p>
@@ -4526,21 +4775,56 @@
               </a:defRPr>
             </a:pPr>
             <a:r>
-              <a:t>4. Strategic Recommendations &amp; Implementation Roadmap</a:t>
-            </a:r>
-          </a:p>
-        </p:txBody>
-      </p:sp>
-      <p:sp>
-        <p:nvSpPr>
-          <p:cNvPr id="4" name="Rounded Rectangle 3"/>
+              <a:t>4. Solution Capabilities: Descriptive, Predictive &amp; Prescriptive Methods</a:t>
+            </a:r>
+          </a:p>
+        </p:txBody>
+      </p:sp>
+      <p:sp>
+        <p:nvSpPr>
+          <p:cNvPr id="4" name="TextBox 3"/>
+          <p:cNvSpPr txBox="1"/>
+          <p:nvPr/>
+        </p:nvSpPr>
+        <p:spPr>
+          <a:xfrm>
+            <a:off x="731520" y="6400800"/>
+            <a:ext cx="10728655" cy="365760"/>
+          </a:xfrm>
+          <a:prstGeom prst="rect">
+            <a:avLst/>
+          </a:prstGeom>
+          <a:noFill/>
+        </p:spPr>
+        <p:txBody>
+          <a:bodyPr wrap="none">
+            <a:spAutoFit/>
+          </a:bodyPr>
+          <a:lstStyle/>
+          <a:p>
+            <a:pPr>
+              <a:defRPr sz="900">
+                <a:solidFill>
+                  <a:srgbClr val="64748B"/>
+                </a:solidFill>
+              </a:defRPr>
+            </a:pPr>
+            <a:r>
+              <a:t>DIY Home Improvement Co. | Executive OTIF Strategy | Slide 5 of 8</a:t>
+            </a:r>
+          </a:p>
+        </p:txBody>
+      </p:sp>
+      <p:sp>
+        <p:nvSpPr>
+          <p:cNvPr id="5" name="Rounded Rectangle 4"/>
           <p:cNvSpPr/>
           <p:nvPr/>
         </p:nvSpPr>
         <p:spPr>
           <a:xfrm>
-            <a:off x="731520" y="1371600"/>
-            <a:ext cx="10698480" cy="1051560"/>
+            <a:off x="731520" y="1280160"/>
+            <a:ext cx="3474720" cy="4937760"/>
           </a:xfrm>
           <a:prstGeom prst="roundRect">
             <a:avLst/>
@@ -4569,44 +4853,68 @@
           </a:fontRef>
         </p:style>
         <p:txBody>
-          <a:bodyPr rtlCol="0" anchor="ctr" wrap="square" lIns="274320" tIns="137160"/>
+          <a:bodyPr rtlCol="0" anchor="ctr" wrap="square" lIns="228600" tIns="274320"/>
           <a:lstStyle/>
           <a:p>
             <a:pPr algn="ctr">
               <a:defRPr sz="1500" b="1">
                 <a:solidFill>
-                  <a:srgbClr val="16A34A"/>
-                </a:solidFill>
-              </a:defRPr>
-            </a:pPr>
-            <a:r>
-              <a:t>1. Automate Expedited Carrier Routing</a:t>
-            </a:r>
-          </a:p>
-          <a:p>
-            <a:pPr>
-              <a:defRPr sz="1200">
+                  <a:srgbClr val="0284C7"/>
+                </a:solidFill>
+              </a:defRPr>
+            </a:pPr>
+            <a:r>
+              <a:t>📊 Descriptive Capabilities</a:t>
+            </a:r>
+          </a:p>
+          <a:p>
+            <a:pPr>
+              <a:defRPr sz="1100">
                 <a:solidFill>
                   <a:srgbClr val="1E293B"/>
                 </a:solidFill>
               </a:defRPr>
             </a:pPr>
             <a:r>
-              <a:t>Direct high-penalty Tier-1 retail shipments through dedicated express freight carriers (FedEx, JB Hunt) to eradicate 82% of late delivery penalties.</a:t>
-            </a:r>
-          </a:p>
-        </p:txBody>
-      </p:sp>
-      <p:sp>
-        <p:nvSpPr>
-          <p:cNvPr id="5" name="Rounded Rectangle 4"/>
+              <a:t>• Executive OTIF Bridge: Waterfall visualization categorizing order losses by defect type.</a:t>
+            </a:r>
+          </a:p>
+          <a:p>
+            <a:pPr>
+              <a:defRPr sz="1100">
+                <a:solidFill>
+                  <a:srgbClr val="1E293B"/>
+                </a:solidFill>
+              </a:defRPr>
+            </a:pPr>
+            <a:r>
+              <a:t>• Multi-Timestamp Audit: Tracks 6 milestones (Order Created -&gt; Factory Planned -&gt; Dispatch -&gt; Ocean -&gt; DC -&gt; Delivery).</a:t>
+            </a:r>
+          </a:p>
+          <a:p>
+            <a:pPr>
+              <a:defRPr sz="1100">
+                <a:solidFill>
+                  <a:srgbClr val="1E293B"/>
+                </a:solidFill>
+              </a:defRPr>
+            </a:pPr>
+            <a:r>
+              <a:t>• Order Execution Log: Filterable line-item timeline with visual plan vs actual variance highlighting.</a:t>
+            </a:r>
+          </a:p>
+        </p:txBody>
+      </p:sp>
+      <p:sp>
+        <p:nvSpPr>
+          <p:cNvPr id="6" name="Rounded Rectangle 5"/>
           <p:cNvSpPr/>
           <p:nvPr/>
         </p:nvSpPr>
         <p:spPr>
           <a:xfrm>
-            <a:off x="731520" y="2606040"/>
-            <a:ext cx="10698480" cy="1051560"/>
+            <a:off x="4343400" y="1280160"/>
+            <a:ext cx="3474720" cy="4937760"/>
           </a:xfrm>
           <a:prstGeom prst="roundRect">
             <a:avLst/>
@@ -4635,44 +4943,68 @@
           </a:fontRef>
         </p:style>
         <p:txBody>
-          <a:bodyPr rtlCol="0" anchor="ctr" wrap="square" lIns="274320" tIns="137160"/>
+          <a:bodyPr rtlCol="0" anchor="ctr" wrap="square" lIns="228600" tIns="274320"/>
           <a:lstStyle/>
           <a:p>
             <a:pPr algn="ctr">
               <a:defRPr sz="1500" b="1">
                 <a:solidFill>
-                  <a:srgbClr val="0284C7"/>
-                </a:solidFill>
-              </a:defRPr>
-            </a:pPr>
-            <a:r>
-              <a:t>2. Origin ASN &amp; Barcode Scanning</a:t>
-            </a:r>
-          </a:p>
-          <a:p>
-            <a:pPr>
-              <a:defRPr sz="1200">
+                  <a:srgbClr val="D97706"/>
+                </a:solidFill>
+              </a:defRPr>
+            </a:pPr>
+            <a:r>
+              <a:t>🔮 Predictive Capabilities</a:t>
+            </a:r>
+          </a:p>
+          <a:p>
+            <a:pPr>
+              <a:defRPr sz="1100">
                 <a:solidFill>
                   <a:srgbClr val="1E293B"/>
                 </a:solidFill>
               </a:defRPr>
             </a:pPr>
             <a:r>
-              <a:t>Deploy automated barcode scanners and packaging checks at Shenzhen and Vietnam plants to prevent dock rejection chargebacks.</a:t>
-            </a:r>
-          </a:p>
-        </p:txBody>
-      </p:sp>
-      <p:sp>
-        <p:nvSpPr>
-          <p:cNvPr id="6" name="Rounded Rectangle 5"/>
+              <a:t>• Carrier Penalty Risk Scoring: Predicts probability of SLA breach by carrier, lane, and season.</a:t>
+            </a:r>
+          </a:p>
+          <a:p>
+            <a:pPr>
+              <a:defRPr sz="1100">
+                <a:solidFill>
+                  <a:srgbClr val="1E293B"/>
+                </a:solidFill>
+              </a:defRPr>
+            </a:pPr>
+            <a:r>
+              <a:t>• Stockout Risk Forecaster: Early warning indicators for DC safety stock depletion.</a:t>
+            </a:r>
+          </a:p>
+          <a:p>
+            <a:pPr>
+              <a:defRPr sz="1100">
+                <a:solidFill>
+                  <a:srgbClr val="1E293B"/>
+                </a:solidFill>
+              </a:defRPr>
+            </a:pPr>
+            <a:r>
+              <a:t>• SLA Violation Predictor: Flags order lines at risk of late delivery 72 hours prior to dispatch.</a:t>
+            </a:r>
+          </a:p>
+        </p:txBody>
+      </p:sp>
+      <p:sp>
+        <p:nvSpPr>
+          <p:cNvPr id="7" name="Rounded Rectangle 6"/>
           <p:cNvSpPr/>
           <p:nvPr/>
         </p:nvSpPr>
         <p:spPr>
           <a:xfrm>
-            <a:off x="731520" y="3840480"/>
-            <a:ext cx="10698480" cy="1051560"/>
+            <a:off x="7955280" y="1280160"/>
+            <a:ext cx="3474720" cy="4937760"/>
           </a:xfrm>
           <a:prstGeom prst="roundRect">
             <a:avLst/>
@@ -4701,44 +5033,213 @@
           </a:fontRef>
         </p:style>
         <p:txBody>
-          <a:bodyPr rtlCol="0" anchor="ctr" wrap="square" lIns="274320" tIns="137160"/>
+          <a:bodyPr rtlCol="0" anchor="ctr" wrap="square" lIns="228600" tIns="274320"/>
           <a:lstStyle/>
           <a:p>
             <a:pPr algn="ctr">
               <a:defRPr sz="1500" b="1">
                 <a:solidFill>
-                  <a:srgbClr val="0F172A"/>
-                </a:solidFill>
-              </a:defRPr>
-            </a:pPr>
-            <a:r>
-              <a:t>3. Dynamic Backlog Allocation</a:t>
-            </a:r>
-          </a:p>
-          <a:p>
-            <a:pPr>
-              <a:defRPr sz="1200">
+                  <a:srgbClr val="16A34A"/>
+                </a:solidFill>
+              </a:defRPr>
+            </a:pPr>
+            <a:r>
+              <a:t>⚙️ Prescriptive Capabilities</a:t>
+            </a:r>
+          </a:p>
+          <a:p>
+            <a:pPr>
+              <a:defRPr sz="1100">
                 <a:solidFill>
                   <a:srgbClr val="1E293B"/>
                 </a:solidFill>
               </a:defRPr>
             </a:pPr>
             <a:r>
-              <a:t>Integrate the Order Assignment Engine with ERP order entry to dynamically assign factory-DC paths within +50% guardrail caps.</a:t>
-            </a:r>
-          </a:p>
-        </p:txBody>
-      </p:sp>
-      <p:sp>
-        <p:nvSpPr>
-          <p:cNvPr id="7" name="Rounded Rectangle 6"/>
+              <a:t>• Order Assignment Profit Engine: Dynamically routes orders to minimize penalties and maximize net margin.</a:t>
+            </a:r>
+          </a:p>
+          <a:p>
+            <a:pPr>
+              <a:defRPr sz="1100">
+                <a:solidFill>
+                  <a:srgbClr val="1E293B"/>
+                </a:solidFill>
+              </a:defRPr>
+            </a:pPr>
+            <a:r>
+              <a:t>• Automated Carrier Optimizer: Balances carrier freight rates against expected penalty risks.</a:t>
+            </a:r>
+          </a:p>
+          <a:p>
+            <a:pPr>
+              <a:defRPr sz="1100">
+                <a:solidFill>
+                  <a:srgbClr val="1E293B"/>
+                </a:solidFill>
+              </a:defRPr>
+            </a:pPr>
+            <a:r>
+              <a:t>• Guardrail Enforcement: Automates policy caps (+50% max order allocation) and backlog auto-loading.</a:t>
+            </a:r>
+          </a:p>
+        </p:txBody>
+      </p:sp>
+    </p:spTree>
+  </p:cSld>
+  <p:clrMapOvr>
+    <a:masterClrMapping/>
+  </p:clrMapOvr>
+</p:sld>
+</file>
+
+<file path=ppt/slides/slide6.xml><?xml version="1.0" encoding="utf-8"?>
+<p:sld xmlns:a="http://schemas.openxmlformats.org/drawingml/2006/main" xmlns:p="http://schemas.openxmlformats.org/presentationml/2006/main" xmlns:r="http://schemas.openxmlformats.org/officeDocument/2006/relationships">
+  <p:cSld>
+    <p:spTree>
+      <p:nvGrpSpPr>
+        <p:cNvPr id="1" name=""/>
+        <p:cNvGrpSpPr/>
+        <p:nvPr/>
+      </p:nvGrpSpPr>
+      <p:grpSpPr/>
+      <p:sp>
+        <p:nvSpPr>
+          <p:cNvPr id="2" name="Rectangle 1"/>
           <p:cNvSpPr/>
           <p:nvPr/>
         </p:nvSpPr>
         <p:spPr>
           <a:xfrm>
-            <a:off x="731520" y="5074920"/>
-            <a:ext cx="10698480" cy="1051560"/>
+            <a:off x="0" y="0"/>
+            <a:ext cx="12191695" cy="1005840"/>
+          </a:xfrm>
+          <a:prstGeom prst="rect">
+            <a:avLst/>
+          </a:prstGeom>
+          <a:solidFill>
+            <a:srgbClr val="0F172A"/>
+          </a:solidFill>
+          <a:ln>
+            <a:solidFill>
+              <a:srgbClr val="0F172A"/>
+            </a:solidFill>
+          </a:ln>
+        </p:spPr>
+        <p:style>
+          <a:lnRef idx="1">
+            <a:schemeClr val="accent1"/>
+          </a:lnRef>
+          <a:fillRef idx="3">
+            <a:schemeClr val="accent1"/>
+          </a:fillRef>
+          <a:effectRef idx="2">
+            <a:schemeClr val="accent1"/>
+          </a:effectRef>
+          <a:fontRef idx="minor">
+            <a:schemeClr val="lt1"/>
+          </a:fontRef>
+        </p:style>
+        <p:txBody>
+          <a:bodyPr rtlCol="0" anchor="ctr"/>
+          <a:lstStyle/>
+          <a:p>
+            <a:pPr algn="ctr"/>
+          </a:p>
+        </p:txBody>
+      </p:sp>
+      <p:sp>
+        <p:nvSpPr>
+          <p:cNvPr id="3" name="TextBox 2"/>
+          <p:cNvSpPr txBox="1"/>
+          <p:nvPr/>
+        </p:nvSpPr>
+        <p:spPr>
+          <a:xfrm>
+            <a:off x="731520" y="137160"/>
+            <a:ext cx="10515600" cy="731520"/>
+          </a:xfrm>
+          <a:prstGeom prst="rect">
+            <a:avLst/>
+          </a:prstGeom>
+          <a:noFill/>
+        </p:spPr>
+        <p:txBody>
+          <a:bodyPr wrap="square">
+            <a:spAutoFit/>
+          </a:bodyPr>
+          <a:lstStyle/>
+          <a:p>
+            <a:pPr>
+              <a:defRPr sz="1000" b="1">
+                <a:solidFill>
+                  <a:srgbClr val="0284C7"/>
+                </a:solidFill>
+              </a:defRPr>
+            </a:pPr>
+            <a:r>
+              <a:t>DIY CO. OTIF DIAGNOSTIC &amp; STRATEGY</a:t>
+            </a:r>
+          </a:p>
+          <a:p>
+            <a:pPr>
+              <a:defRPr sz="2000" b="1">
+                <a:solidFill>
+                  <a:srgbClr val="FFFFFF"/>
+                </a:solidFill>
+              </a:defRPr>
+            </a:pPr>
+            <a:r>
+              <a:t>5. High-Level Data Requirements &amp; Integration Architecture</a:t>
+            </a:r>
+          </a:p>
+        </p:txBody>
+      </p:sp>
+      <p:sp>
+        <p:nvSpPr>
+          <p:cNvPr id="4" name="TextBox 3"/>
+          <p:cNvSpPr txBox="1"/>
+          <p:nvPr/>
+        </p:nvSpPr>
+        <p:spPr>
+          <a:xfrm>
+            <a:off x="731520" y="6400800"/>
+            <a:ext cx="10728655" cy="365760"/>
+          </a:xfrm>
+          <a:prstGeom prst="rect">
+            <a:avLst/>
+          </a:prstGeom>
+          <a:noFill/>
+        </p:spPr>
+        <p:txBody>
+          <a:bodyPr wrap="none">
+            <a:spAutoFit/>
+          </a:bodyPr>
+          <a:lstStyle/>
+          <a:p>
+            <a:pPr>
+              <a:defRPr sz="900">
+                <a:solidFill>
+                  <a:srgbClr val="64748B"/>
+                </a:solidFill>
+              </a:defRPr>
+            </a:pPr>
+            <a:r>
+              <a:t>DIY Home Improvement Co. | Executive OTIF Strategy | Slide 6 of 8</a:t>
+            </a:r>
+          </a:p>
+        </p:txBody>
+      </p:sp>
+      <p:sp>
+        <p:nvSpPr>
+          <p:cNvPr id="5" name="Rounded Rectangle 4"/>
+          <p:cNvSpPr/>
+          <p:nvPr/>
+        </p:nvSpPr>
+        <p:spPr>
+          <a:xfrm>
+            <a:off x="731520" y="1280160"/>
+            <a:ext cx="5120640" cy="2286000"/>
           </a:xfrm>
           <a:prstGeom prst="roundRect">
             <a:avLst/>
@@ -4767,30 +5268,1263 @@
           </a:fontRef>
         </p:style>
         <p:txBody>
-          <a:bodyPr rtlCol="0" anchor="ctr" wrap="square" lIns="274320" tIns="137160"/>
+          <a:bodyPr rtlCol="0" anchor="ctr" wrap="square" lIns="228600" tIns="182880"/>
           <a:lstStyle/>
           <a:p>
             <a:pPr algn="ctr">
-              <a:defRPr sz="1500" b="1">
+              <a:defRPr sz="1400" b="1">
+                <a:solidFill>
+                  <a:srgbClr val="0F172A"/>
+                </a:solidFill>
+              </a:defRPr>
+            </a:pPr>
+            <a:r>
+              <a:t>1. Order &amp; Product Master Data</a:t>
+            </a:r>
+          </a:p>
+          <a:p>
+            <a:pPr>
+              <a:defRPr sz="1000" b="1">
+                <a:solidFill>
+                  <a:srgbClr val="0284C7"/>
+                </a:solidFill>
+              </a:defRPr>
+            </a:pPr>
+            <a:r>
+              <a:t>Primary Source: ERP (SAP / Oracle)</a:t>
+            </a:r>
+          </a:p>
+          <a:p>
+            <a:pPr>
+              <a:defRPr sz="1000">
                 <a:solidFill>
                   <a:srgbClr val="1E293B"/>
                 </a:solidFill>
               </a:defRPr>
             </a:pPr>
             <a:r>
-              <a:t>4. Multi-Tier Supplier SLA Monitoring</a:t>
-            </a:r>
-          </a:p>
-          <a:p>
-            <a:pPr>
-              <a:defRPr sz="1200">
+              <a:t>✔ SKU ID, Category, Description, Bill of Materials (BOM)</a:t>
+            </a:r>
+          </a:p>
+          <a:p>
+            <a:pPr>
+              <a:defRPr sz="1000">
                 <a:solidFill>
                   <a:srgbClr val="1E293B"/>
                 </a:solidFill>
               </a:defRPr>
             </a:pPr>
             <a:r>
-              <a:t>Track component suppliers (Osaka Lithium, Taiwan Gear, Ningbo Motor) to resolve upstream component bottlenecks early.</a:t>
+              <a:t>✔ Wholesale Price ($/unit), Manufacturing Cost ($/unit)</a:t>
+            </a:r>
+          </a:p>
+          <a:p>
+            <a:pPr>
+              <a:defRPr sz="1000">
+                <a:solidFill>
+                  <a:srgbClr val="1E293B"/>
+                </a:solidFill>
+              </a:defRPr>
+            </a:pPr>
+            <a:r>
+              <a:t>✔ Order Quantity, Customer Order ID, Order Creation Date</a:t>
+            </a:r>
+          </a:p>
+        </p:txBody>
+      </p:sp>
+      <p:sp>
+        <p:nvSpPr>
+          <p:cNvPr id="6" name="Rounded Rectangle 5"/>
+          <p:cNvSpPr/>
+          <p:nvPr/>
+        </p:nvSpPr>
+        <p:spPr>
+          <a:xfrm>
+            <a:off x="6126480" y="1280160"/>
+            <a:ext cx="5120640" cy="2286000"/>
+          </a:xfrm>
+          <a:prstGeom prst="roundRect">
+            <a:avLst/>
+          </a:prstGeom>
+          <a:solidFill>
+            <a:srgbClr val="F8FAFC"/>
+          </a:solidFill>
+          <a:ln>
+            <a:solidFill>
+              <a:srgbClr val="E2E8F0"/>
+            </a:solidFill>
+          </a:ln>
+        </p:spPr>
+        <p:style>
+          <a:lnRef idx="1">
+            <a:schemeClr val="accent1"/>
+          </a:lnRef>
+          <a:fillRef idx="3">
+            <a:schemeClr val="accent1"/>
+          </a:fillRef>
+          <a:effectRef idx="2">
+            <a:schemeClr val="accent1"/>
+          </a:effectRef>
+          <a:fontRef idx="minor">
+            <a:schemeClr val="lt1"/>
+          </a:fontRef>
+        </p:style>
+        <p:txBody>
+          <a:bodyPr rtlCol="0" anchor="ctr" wrap="square" lIns="228600" tIns="182880"/>
+          <a:lstStyle/>
+          <a:p>
+            <a:pPr algn="ctr">
+              <a:defRPr sz="1400" b="1">
+                <a:solidFill>
+                  <a:srgbClr val="0F172A"/>
+                </a:solidFill>
+              </a:defRPr>
+            </a:pPr>
+            <a:r>
+              <a:t>2. Customer SLA &amp; Contract Terms</a:t>
+            </a:r>
+          </a:p>
+          <a:p>
+            <a:pPr>
+              <a:defRPr sz="1000" b="1">
+                <a:solidFill>
+                  <a:srgbClr val="0284C7"/>
+                </a:solidFill>
+              </a:defRPr>
+            </a:pPr>
+            <a:r>
+              <a:t>Primary Source: CRM / Contract Repository</a:t>
+            </a:r>
+          </a:p>
+          <a:p>
+            <a:pPr>
+              <a:defRPr sz="1000">
+                <a:solidFill>
+                  <a:srgbClr val="1E293B"/>
+                </a:solidFill>
+              </a:defRPr>
+            </a:pPr>
+            <a:r>
+              <a:t>✔ Retailer SLA Window (e.g., 2-Day vs 5-Day Delivery)</a:t>
+            </a:r>
+          </a:p>
+          <a:p>
+            <a:pPr>
+              <a:defRPr sz="1000">
+                <a:solidFill>
+                  <a:srgbClr val="1E293B"/>
+                </a:solidFill>
+              </a:defRPr>
+            </a:pPr>
+            <a:r>
+              <a:t>✔ Late Delivery Penalty Rate ($/day)</a:t>
+            </a:r>
+          </a:p>
+          <a:p>
+            <a:pPr>
+              <a:defRPr sz="1000">
+                <a:solidFill>
+                  <a:srgbClr val="1E293B"/>
+                </a:solidFill>
+              </a:defRPr>
+            </a:pPr>
+            <a:r>
+              <a:t>✔ Dock Rejection Penalty Rate (% line item value)</a:t>
+            </a:r>
+          </a:p>
+        </p:txBody>
+      </p:sp>
+      <p:sp>
+        <p:nvSpPr>
+          <p:cNvPr id="7" name="Rounded Rectangle 6"/>
+          <p:cNvSpPr/>
+          <p:nvPr/>
+        </p:nvSpPr>
+        <p:spPr>
+          <a:xfrm>
+            <a:off x="731520" y="3749039"/>
+            <a:ext cx="5120640" cy="2286000"/>
+          </a:xfrm>
+          <a:prstGeom prst="roundRect">
+            <a:avLst/>
+          </a:prstGeom>
+          <a:solidFill>
+            <a:srgbClr val="F8FAFC"/>
+          </a:solidFill>
+          <a:ln>
+            <a:solidFill>
+              <a:srgbClr val="E2E8F0"/>
+            </a:solidFill>
+          </a:ln>
+        </p:spPr>
+        <p:style>
+          <a:lnRef idx="1">
+            <a:schemeClr val="accent1"/>
+          </a:lnRef>
+          <a:fillRef idx="3">
+            <a:schemeClr val="accent1"/>
+          </a:fillRef>
+          <a:effectRef idx="2">
+            <a:schemeClr val="accent1"/>
+          </a:effectRef>
+          <a:fontRef idx="minor">
+            <a:schemeClr val="lt1"/>
+          </a:fontRef>
+        </p:style>
+        <p:txBody>
+          <a:bodyPr rtlCol="0" anchor="ctr" wrap="square" lIns="228600" tIns="182880"/>
+          <a:lstStyle/>
+          <a:p>
+            <a:pPr algn="ctr">
+              <a:defRPr sz="1400" b="1">
+                <a:solidFill>
+                  <a:srgbClr val="0F172A"/>
+                </a:solidFill>
+              </a:defRPr>
+            </a:pPr>
+            <a:r>
+              <a:t>3. Supply Chain Node Timestamps</a:t>
+            </a:r>
+          </a:p>
+          <a:p>
+            <a:pPr>
+              <a:defRPr sz="1000" b="1">
+                <a:solidFill>
+                  <a:srgbClr val="0284C7"/>
+                </a:solidFill>
+              </a:defRPr>
+            </a:pPr>
+            <a:r>
+              <a:t>Primary Source: WMS / TMS / Ocean Carrier APIs</a:t>
+            </a:r>
+          </a:p>
+          <a:p>
+            <a:pPr>
+              <a:defRPr sz="1000">
+                <a:solidFill>
+                  <a:srgbClr val="1E293B"/>
+                </a:solidFill>
+              </a:defRPr>
+            </a:pPr>
+            <a:r>
+              <a:t>✔ Factory Planned &amp; Actual Production Complete Timestamps</a:t>
+            </a:r>
+          </a:p>
+          <a:p>
+            <a:pPr>
+              <a:defRPr sz="1000">
+                <a:solidFill>
+                  <a:srgbClr val="1E293B"/>
+                </a:solidFill>
+              </a:defRPr>
+            </a:pPr>
+            <a:r>
+              <a:t>✔ Factory Departure &amp; Ocean Port ETD/ETA Timestamps</a:t>
+            </a:r>
+          </a:p>
+          <a:p>
+            <a:pPr>
+              <a:defRPr sz="1000">
+                <a:solidFill>
+                  <a:srgbClr val="1E293B"/>
+                </a:solidFill>
+              </a:defRPr>
+            </a:pPr>
+            <a:r>
+              <a:t>✔ DC Inbound Arrival, Pick/Pack &amp; Outbound Dispatch Timestamps</a:t>
+            </a:r>
+          </a:p>
+        </p:txBody>
+      </p:sp>
+      <p:sp>
+        <p:nvSpPr>
+          <p:cNvPr id="8" name="Rounded Rectangle 7"/>
+          <p:cNvSpPr/>
+          <p:nvPr/>
+        </p:nvSpPr>
+        <p:spPr>
+          <a:xfrm>
+            <a:off x="6126480" y="3749039"/>
+            <a:ext cx="5120640" cy="2286000"/>
+          </a:xfrm>
+          <a:prstGeom prst="roundRect">
+            <a:avLst/>
+          </a:prstGeom>
+          <a:solidFill>
+            <a:srgbClr val="F8FAFC"/>
+          </a:solidFill>
+          <a:ln>
+            <a:solidFill>
+              <a:srgbClr val="E2E8F0"/>
+            </a:solidFill>
+          </a:ln>
+        </p:spPr>
+        <p:style>
+          <a:lnRef idx="1">
+            <a:schemeClr val="accent1"/>
+          </a:lnRef>
+          <a:fillRef idx="3">
+            <a:schemeClr val="accent1"/>
+          </a:fillRef>
+          <a:effectRef idx="2">
+            <a:schemeClr val="accent1"/>
+          </a:effectRef>
+          <a:fontRef idx="minor">
+            <a:schemeClr val="lt1"/>
+          </a:fontRef>
+        </p:style>
+        <p:txBody>
+          <a:bodyPr rtlCol="0" anchor="ctr" wrap="square" lIns="228600" tIns="182880"/>
+          <a:lstStyle/>
+          <a:p>
+            <a:pPr algn="ctr">
+              <a:defRPr sz="1400" b="1">
+                <a:solidFill>
+                  <a:srgbClr val="0F172A"/>
+                </a:solidFill>
+              </a:defRPr>
+            </a:pPr>
+            <a:r>
+              <a:t>4. Carrier &amp; Freight Rates</a:t>
+            </a:r>
+          </a:p>
+          <a:p>
+            <a:pPr>
+              <a:defRPr sz="1000" b="1">
+                <a:solidFill>
+                  <a:srgbClr val="0284C7"/>
+                </a:solidFill>
+              </a:defRPr>
+            </a:pPr>
+            <a:r>
+              <a:t>Primary Source: TMS / Logistics Master Data</a:t>
+            </a:r>
+          </a:p>
+          <a:p>
+            <a:pPr>
+              <a:defRPr sz="1000">
+                <a:solidFill>
+                  <a:srgbClr val="1E293B"/>
+                </a:solidFill>
+              </a:defRPr>
+            </a:pPr>
+            <a:r>
+              <a:t>✔ Freight Rate ($/lane/unit) for FedEx, JB Hunt, Schneider, DHL, UPS</a:t>
+            </a:r>
+          </a:p>
+          <a:p>
+            <a:pPr>
+              <a:defRPr sz="1000">
+                <a:solidFill>
+                  <a:srgbClr val="1E293B"/>
+                </a:solidFill>
+              </a:defRPr>
+            </a:pPr>
+            <a:r>
+              <a:t>✔ Historical Carrier SLA On-Time Delivery Rate (%)</a:t>
+            </a:r>
+          </a:p>
+          <a:p>
+            <a:pPr>
+              <a:defRPr sz="1000">
+                <a:solidFill>
+                  <a:srgbClr val="1E293B"/>
+                </a:solidFill>
+              </a:defRPr>
+            </a:pPr>
+            <a:r>
+              <a:t>✔ Historical Package Damage &amp; Dock Rejection Rate (%)</a:t>
+            </a:r>
+          </a:p>
+        </p:txBody>
+      </p:sp>
+    </p:spTree>
+  </p:cSld>
+  <p:clrMapOvr>
+    <a:masterClrMapping/>
+  </p:clrMapOvr>
+</p:sld>
+</file>
+
+<file path=ppt/slides/slide7.xml><?xml version="1.0" encoding="utf-8"?>
+<p:sld xmlns:a="http://schemas.openxmlformats.org/drawingml/2006/main" xmlns:p="http://schemas.openxmlformats.org/presentationml/2006/main" xmlns:r="http://schemas.openxmlformats.org/officeDocument/2006/relationships">
+  <p:cSld>
+    <p:spTree>
+      <p:nvGrpSpPr>
+        <p:cNvPr id="1" name=""/>
+        <p:cNvGrpSpPr/>
+        <p:nvPr/>
+      </p:nvGrpSpPr>
+      <p:grpSpPr/>
+      <p:sp>
+        <p:nvSpPr>
+          <p:cNvPr id="2" name="Rectangle 1"/>
+          <p:cNvSpPr/>
+          <p:nvPr/>
+        </p:nvSpPr>
+        <p:spPr>
+          <a:xfrm>
+            <a:off x="0" y="0"/>
+            <a:ext cx="12191695" cy="1005840"/>
+          </a:xfrm>
+          <a:prstGeom prst="rect">
+            <a:avLst/>
+          </a:prstGeom>
+          <a:solidFill>
+            <a:srgbClr val="0F172A"/>
+          </a:solidFill>
+          <a:ln>
+            <a:solidFill>
+              <a:srgbClr val="0F172A"/>
+            </a:solidFill>
+          </a:ln>
+        </p:spPr>
+        <p:style>
+          <a:lnRef idx="1">
+            <a:schemeClr val="accent1"/>
+          </a:lnRef>
+          <a:fillRef idx="3">
+            <a:schemeClr val="accent1"/>
+          </a:fillRef>
+          <a:effectRef idx="2">
+            <a:schemeClr val="accent1"/>
+          </a:effectRef>
+          <a:fontRef idx="minor">
+            <a:schemeClr val="lt1"/>
+          </a:fontRef>
+        </p:style>
+        <p:txBody>
+          <a:bodyPr rtlCol="0" anchor="ctr"/>
+          <a:lstStyle/>
+          <a:p>
+            <a:pPr algn="ctr"/>
+          </a:p>
+        </p:txBody>
+      </p:sp>
+      <p:sp>
+        <p:nvSpPr>
+          <p:cNvPr id="3" name="TextBox 2"/>
+          <p:cNvSpPr txBox="1"/>
+          <p:nvPr/>
+        </p:nvSpPr>
+        <p:spPr>
+          <a:xfrm>
+            <a:off x="731520" y="137160"/>
+            <a:ext cx="10515600" cy="731520"/>
+          </a:xfrm>
+          <a:prstGeom prst="rect">
+            <a:avLst/>
+          </a:prstGeom>
+          <a:noFill/>
+        </p:spPr>
+        <p:txBody>
+          <a:bodyPr wrap="square">
+            <a:spAutoFit/>
+          </a:bodyPr>
+          <a:lstStyle/>
+          <a:p>
+            <a:pPr>
+              <a:defRPr sz="1000" b="1">
+                <a:solidFill>
+                  <a:srgbClr val="0284C7"/>
+                </a:solidFill>
+              </a:defRPr>
+            </a:pPr>
+            <a:r>
+              <a:t>DIY CO. OTIF DIAGNOSTIC &amp; STRATEGY</a:t>
+            </a:r>
+          </a:p>
+          <a:p>
+            <a:pPr>
+              <a:defRPr sz="2000" b="1">
+                <a:solidFill>
+                  <a:srgbClr val="FFFFFF"/>
+                </a:solidFill>
+              </a:defRPr>
+            </a:pPr>
+            <a:r>
+              <a:t>6. High-Level 3-Month Activity &amp; Implementation Roadmap</a:t>
+            </a:r>
+          </a:p>
+        </p:txBody>
+      </p:sp>
+      <p:sp>
+        <p:nvSpPr>
+          <p:cNvPr id="4" name="TextBox 3"/>
+          <p:cNvSpPr txBox="1"/>
+          <p:nvPr/>
+        </p:nvSpPr>
+        <p:spPr>
+          <a:xfrm>
+            <a:off x="731520" y="6400800"/>
+            <a:ext cx="10728655" cy="365760"/>
+          </a:xfrm>
+          <a:prstGeom prst="rect">
+            <a:avLst/>
+          </a:prstGeom>
+          <a:noFill/>
+        </p:spPr>
+        <p:txBody>
+          <a:bodyPr wrap="none">
+            <a:spAutoFit/>
+          </a:bodyPr>
+          <a:lstStyle/>
+          <a:p>
+            <a:pPr>
+              <a:defRPr sz="900">
+                <a:solidFill>
+                  <a:srgbClr val="64748B"/>
+                </a:solidFill>
+              </a:defRPr>
+            </a:pPr>
+            <a:r>
+              <a:t>DIY Home Improvement Co. | Executive OTIF Strategy | Slide 7 of 8</a:t>
+            </a:r>
+          </a:p>
+        </p:txBody>
+      </p:sp>
+      <p:sp>
+        <p:nvSpPr>
+          <p:cNvPr id="5" name="Rounded Rectangle 4"/>
+          <p:cNvSpPr/>
+          <p:nvPr/>
+        </p:nvSpPr>
+        <p:spPr>
+          <a:xfrm>
+            <a:off x="731520" y="1280160"/>
+            <a:ext cx="3474720" cy="4937760"/>
+          </a:xfrm>
+          <a:prstGeom prst="roundRect">
+            <a:avLst/>
+          </a:prstGeom>
+          <a:solidFill>
+            <a:srgbClr val="F8FAFC"/>
+          </a:solidFill>
+          <a:ln>
+            <a:solidFill>
+              <a:srgbClr val="E2E8F0"/>
+            </a:solidFill>
+          </a:ln>
+        </p:spPr>
+        <p:style>
+          <a:lnRef idx="1">
+            <a:schemeClr val="accent1"/>
+          </a:lnRef>
+          <a:fillRef idx="3">
+            <a:schemeClr val="accent1"/>
+          </a:fillRef>
+          <a:effectRef idx="2">
+            <a:schemeClr val="accent1"/>
+          </a:effectRef>
+          <a:fontRef idx="minor">
+            <a:schemeClr val="lt1"/>
+          </a:fontRef>
+        </p:style>
+        <p:txBody>
+          <a:bodyPr rtlCol="0" anchor="ctr" wrap="square" lIns="228600" tIns="274320"/>
+          <a:lstStyle/>
+          <a:p>
+            <a:pPr algn="ctr">
+              <a:defRPr sz="1300" b="1">
+                <a:solidFill>
+                  <a:srgbClr val="0284C7"/>
+                </a:solidFill>
+              </a:defRPr>
+            </a:pPr>
+            <a:r>
+              <a:t>MONTH 1: Foundation &amp; Data Integration</a:t>
+            </a:r>
+          </a:p>
+          <a:p>
+            <a:pPr>
+              <a:defRPr sz="1000">
+                <a:solidFill>
+                  <a:srgbClr val="1E293B"/>
+                </a:solidFill>
+              </a:defRPr>
+            </a:pPr>
+            <a:r>
+              <a:t>Milestone 1.1: Ingest ERP/TMS data streams for 6 supply chain timestamps.</a:t>
+            </a:r>
+          </a:p>
+          <a:p>
+            <a:pPr>
+              <a:defRPr sz="1000">
+                <a:solidFill>
+                  <a:srgbClr val="1E293B"/>
+                </a:solidFill>
+              </a:defRPr>
+            </a:pPr>
+            <a:r>
+              <a:t>Milestone 1.2: Establish Master Data schema across 13 SKUs, 5 categories, and retail clients.</a:t>
+            </a:r>
+          </a:p>
+          <a:p>
+            <a:pPr>
+              <a:defRPr sz="1000">
+                <a:solidFill>
+                  <a:srgbClr val="1E293B"/>
+                </a:solidFill>
+              </a:defRPr>
+            </a:pPr>
+            <a:r>
+              <a:t>Milestone 1.3: Deploy Descriptive OTIF Waterfall Bridge &amp; Order Execution Log.</a:t>
+            </a:r>
+          </a:p>
+          <a:p>
+            <a:pPr>
+              <a:defRPr sz="1000">
+                <a:solidFill>
+                  <a:srgbClr val="1E293B"/>
+                </a:solidFill>
+              </a:defRPr>
+            </a:pPr>
+            <a:r>
+              <a:t>Deliverable: Unified Data Lake &amp; Baseline OTIF Diagnostic Dashboard.</a:t>
+            </a:r>
+          </a:p>
+        </p:txBody>
+      </p:sp>
+      <p:sp>
+        <p:nvSpPr>
+          <p:cNvPr id="6" name="Rounded Rectangle 5"/>
+          <p:cNvSpPr/>
+          <p:nvPr/>
+        </p:nvSpPr>
+        <p:spPr>
+          <a:xfrm>
+            <a:off x="4343400" y="1280160"/>
+            <a:ext cx="3474720" cy="4937760"/>
+          </a:xfrm>
+          <a:prstGeom prst="roundRect">
+            <a:avLst/>
+          </a:prstGeom>
+          <a:solidFill>
+            <a:srgbClr val="F8FAFC"/>
+          </a:solidFill>
+          <a:ln>
+            <a:solidFill>
+              <a:srgbClr val="E2E8F0"/>
+            </a:solidFill>
+          </a:ln>
+        </p:spPr>
+        <p:style>
+          <a:lnRef idx="1">
+            <a:schemeClr val="accent1"/>
+          </a:lnRef>
+          <a:fillRef idx="3">
+            <a:schemeClr val="accent1"/>
+          </a:fillRef>
+          <a:effectRef idx="2">
+            <a:schemeClr val="accent1"/>
+          </a:effectRef>
+          <a:fontRef idx="minor">
+            <a:schemeClr val="lt1"/>
+          </a:fontRef>
+        </p:style>
+        <p:txBody>
+          <a:bodyPr rtlCol="0" anchor="ctr" wrap="square" lIns="228600" tIns="274320"/>
+          <a:lstStyle/>
+          <a:p>
+            <a:pPr algn="ctr">
+              <a:defRPr sz="1300" b="1">
+                <a:solidFill>
+                  <a:srgbClr val="D97706"/>
+                </a:solidFill>
+              </a:defRPr>
+            </a:pPr>
+            <a:r>
+              <a:t>MONTH 2: Predictive Risk &amp; Prescriptive Engine</a:t>
+            </a:r>
+          </a:p>
+          <a:p>
+            <a:pPr>
+              <a:defRPr sz="1000">
+                <a:solidFill>
+                  <a:srgbClr val="1E293B"/>
+                </a:solidFill>
+              </a:defRPr>
+            </a:pPr>
+            <a:r>
+              <a:t>Milestone 2.1: Calibrate Carrier SLA audit &amp; penalty risk prediction models.</a:t>
+            </a:r>
+          </a:p>
+          <a:p>
+            <a:pPr>
+              <a:defRPr sz="1000">
+                <a:solidFill>
+                  <a:srgbClr val="1E293B"/>
+                </a:solidFill>
+              </a:defRPr>
+            </a:pPr>
+            <a:r>
+              <a:t>Milestone 2.2: Implement Order Assignment Profit Engine with guardrails (+50% cap).</a:t>
+            </a:r>
+          </a:p>
+          <a:p>
+            <a:pPr>
+              <a:defRPr sz="1000">
+                <a:solidFill>
+                  <a:srgbClr val="1E293B"/>
+                </a:solidFill>
+              </a:defRPr>
+            </a:pPr>
+            <a:r>
+              <a:t>Milestone 2.3: Integrate future order backlog auto-allocation module.</a:t>
+            </a:r>
+          </a:p>
+          <a:p>
+            <a:pPr>
+              <a:defRPr sz="1000">
+                <a:solidFill>
+                  <a:srgbClr val="1E293B"/>
+                </a:solidFill>
+              </a:defRPr>
+            </a:pPr>
+            <a:r>
+              <a:t>Deliverable: Fully Configured Profit Optimizer &amp; Risk Scoring API.</a:t>
+            </a:r>
+          </a:p>
+        </p:txBody>
+      </p:sp>
+      <p:sp>
+        <p:nvSpPr>
+          <p:cNvPr id="7" name="Rounded Rectangle 6"/>
+          <p:cNvSpPr/>
+          <p:nvPr/>
+        </p:nvSpPr>
+        <p:spPr>
+          <a:xfrm>
+            <a:off x="7955280" y="1280160"/>
+            <a:ext cx="3474720" cy="4937760"/>
+          </a:xfrm>
+          <a:prstGeom prst="roundRect">
+            <a:avLst/>
+          </a:prstGeom>
+          <a:solidFill>
+            <a:srgbClr val="F8FAFC"/>
+          </a:solidFill>
+          <a:ln>
+            <a:solidFill>
+              <a:srgbClr val="E2E8F0"/>
+            </a:solidFill>
+          </a:ln>
+        </p:spPr>
+        <p:style>
+          <a:lnRef idx="1">
+            <a:schemeClr val="accent1"/>
+          </a:lnRef>
+          <a:fillRef idx="3">
+            <a:schemeClr val="accent1"/>
+          </a:fillRef>
+          <a:effectRef idx="2">
+            <a:schemeClr val="accent1"/>
+          </a:effectRef>
+          <a:fontRef idx="minor">
+            <a:schemeClr val="lt1"/>
+          </a:fontRef>
+        </p:style>
+        <p:txBody>
+          <a:bodyPr rtlCol="0" anchor="ctr" wrap="square" lIns="228600" tIns="274320"/>
+          <a:lstStyle/>
+          <a:p>
+            <a:pPr algn="ctr">
+              <a:defRPr sz="1300" b="1">
+                <a:solidFill>
+                  <a:srgbClr val="16A34A"/>
+                </a:solidFill>
+              </a:defRPr>
+            </a:pPr>
+            <a:r>
+              <a:t>MONTH 3: Automation, Pilot &amp; Full Go-Live</a:t>
+            </a:r>
+          </a:p>
+          <a:p>
+            <a:pPr>
+              <a:defRPr sz="1000">
+                <a:solidFill>
+                  <a:srgbClr val="1E293B"/>
+                </a:solidFill>
+              </a:defRPr>
+            </a:pPr>
+            <a:r>
+              <a:t>Milestone 3.1: Pilot automated carrier routing with Tier-1 accounts (Home Depot, Lowe's).</a:t>
+            </a:r>
+          </a:p>
+          <a:p>
+            <a:pPr>
+              <a:defRPr sz="1000">
+                <a:solidFill>
+                  <a:srgbClr val="1E293B"/>
+                </a:solidFill>
+              </a:defRPr>
+            </a:pPr>
+            <a:r>
+              <a:t>Milestone 3.2: Deploy barcode &amp; ASN validation scanners at origin plants (Shenzhen/Vietnam).</a:t>
+            </a:r>
+          </a:p>
+          <a:p>
+            <a:pPr>
+              <a:defRPr sz="1000">
+                <a:solidFill>
+                  <a:srgbClr val="1E293B"/>
+                </a:solidFill>
+              </a:defRPr>
+            </a:pPr>
+            <a:r>
+              <a:t>Milestone 3.3: Conduct user training and executive dashboard rollout across all categories.</a:t>
+            </a:r>
+          </a:p>
+          <a:p>
+            <a:pPr>
+              <a:defRPr sz="1000">
+                <a:solidFill>
+                  <a:srgbClr val="1E293B"/>
+                </a:solidFill>
+              </a:defRPr>
+            </a:pPr>
+            <a:r>
+              <a:t>Deliverable: Full Go-Live &amp; Expected Net Profit Lift +$1.04M.</a:t>
+            </a:r>
+          </a:p>
+        </p:txBody>
+      </p:sp>
+    </p:spTree>
+  </p:cSld>
+  <p:clrMapOvr>
+    <a:masterClrMapping/>
+  </p:clrMapOvr>
+</p:sld>
+</file>
+
+<file path=ppt/slides/slide8.xml><?xml version="1.0" encoding="utf-8"?>
+<p:sld xmlns:a="http://schemas.openxmlformats.org/drawingml/2006/main" xmlns:p="http://schemas.openxmlformats.org/presentationml/2006/main" xmlns:r="http://schemas.openxmlformats.org/officeDocument/2006/relationships">
+  <p:cSld>
+    <p:spTree>
+      <p:nvGrpSpPr>
+        <p:cNvPr id="1" name=""/>
+        <p:cNvGrpSpPr/>
+        <p:nvPr/>
+      </p:nvGrpSpPr>
+      <p:grpSpPr/>
+      <p:sp>
+        <p:nvSpPr>
+          <p:cNvPr id="2" name="Rectangle 1"/>
+          <p:cNvSpPr/>
+          <p:nvPr/>
+        </p:nvSpPr>
+        <p:spPr>
+          <a:xfrm>
+            <a:off x="0" y="0"/>
+            <a:ext cx="12191695" cy="1005840"/>
+          </a:xfrm>
+          <a:prstGeom prst="rect">
+            <a:avLst/>
+          </a:prstGeom>
+          <a:solidFill>
+            <a:srgbClr val="0F172A"/>
+          </a:solidFill>
+          <a:ln>
+            <a:solidFill>
+              <a:srgbClr val="0F172A"/>
+            </a:solidFill>
+          </a:ln>
+        </p:spPr>
+        <p:style>
+          <a:lnRef idx="1">
+            <a:schemeClr val="accent1"/>
+          </a:lnRef>
+          <a:fillRef idx="3">
+            <a:schemeClr val="accent1"/>
+          </a:fillRef>
+          <a:effectRef idx="2">
+            <a:schemeClr val="accent1"/>
+          </a:effectRef>
+          <a:fontRef idx="minor">
+            <a:schemeClr val="lt1"/>
+          </a:fontRef>
+        </p:style>
+        <p:txBody>
+          <a:bodyPr rtlCol="0" anchor="ctr"/>
+          <a:lstStyle/>
+          <a:p>
+            <a:pPr algn="ctr"/>
+          </a:p>
+        </p:txBody>
+      </p:sp>
+      <p:sp>
+        <p:nvSpPr>
+          <p:cNvPr id="3" name="TextBox 2"/>
+          <p:cNvSpPr txBox="1"/>
+          <p:nvPr/>
+        </p:nvSpPr>
+        <p:spPr>
+          <a:xfrm>
+            <a:off x="731520" y="137160"/>
+            <a:ext cx="10515600" cy="731520"/>
+          </a:xfrm>
+          <a:prstGeom prst="rect">
+            <a:avLst/>
+          </a:prstGeom>
+          <a:noFill/>
+        </p:spPr>
+        <p:txBody>
+          <a:bodyPr wrap="square">
+            <a:spAutoFit/>
+          </a:bodyPr>
+          <a:lstStyle/>
+          <a:p>
+            <a:pPr>
+              <a:defRPr sz="1000" b="1">
+                <a:solidFill>
+                  <a:srgbClr val="0284C7"/>
+                </a:solidFill>
+              </a:defRPr>
+            </a:pPr>
+            <a:r>
+              <a:t>DIY CO. OTIF DIAGNOSTIC &amp; STRATEGY</a:t>
+            </a:r>
+          </a:p>
+          <a:p>
+            <a:pPr>
+              <a:defRPr sz="2000" b="1">
+                <a:solidFill>
+                  <a:srgbClr val="FFFFFF"/>
+                </a:solidFill>
+              </a:defRPr>
+            </a:pPr>
+            <a:r>
+              <a:t>7. Expected Business Value &amp; Executive Summary</a:t>
+            </a:r>
+          </a:p>
+        </p:txBody>
+      </p:sp>
+      <p:sp>
+        <p:nvSpPr>
+          <p:cNvPr id="4" name="TextBox 3"/>
+          <p:cNvSpPr txBox="1"/>
+          <p:nvPr/>
+        </p:nvSpPr>
+        <p:spPr>
+          <a:xfrm>
+            <a:off x="731520" y="6400800"/>
+            <a:ext cx="10728655" cy="365760"/>
+          </a:xfrm>
+          <a:prstGeom prst="rect">
+            <a:avLst/>
+          </a:prstGeom>
+          <a:noFill/>
+        </p:spPr>
+        <p:txBody>
+          <a:bodyPr wrap="none">
+            <a:spAutoFit/>
+          </a:bodyPr>
+          <a:lstStyle/>
+          <a:p>
+            <a:pPr>
+              <a:defRPr sz="900">
+                <a:solidFill>
+                  <a:srgbClr val="64748B"/>
+                </a:solidFill>
+              </a:defRPr>
+            </a:pPr>
+            <a:r>
+              <a:t>DIY Home Improvement Co. | Executive OTIF Strategy | Slide 8 of 8</a:t>
+            </a:r>
+          </a:p>
+        </p:txBody>
+      </p:sp>
+      <p:sp>
+        <p:nvSpPr>
+          <p:cNvPr id="5" name="Rounded Rectangle 4"/>
+          <p:cNvSpPr/>
+          <p:nvPr/>
+        </p:nvSpPr>
+        <p:spPr>
+          <a:xfrm>
+            <a:off x="731520" y="1280160"/>
+            <a:ext cx="5120640" cy="4937760"/>
+          </a:xfrm>
+          <a:prstGeom prst="roundRect">
+            <a:avLst/>
+          </a:prstGeom>
+          <a:solidFill>
+            <a:srgbClr val="0F172A"/>
+          </a:solidFill>
+          <a:ln>
+            <a:solidFill>
+              <a:srgbClr val="0F172A"/>
+            </a:solidFill>
+          </a:ln>
+        </p:spPr>
+        <p:style>
+          <a:lnRef idx="1">
+            <a:schemeClr val="accent1"/>
+          </a:lnRef>
+          <a:fillRef idx="3">
+            <a:schemeClr val="accent1"/>
+          </a:fillRef>
+          <a:effectRef idx="2">
+            <a:schemeClr val="accent1"/>
+          </a:effectRef>
+          <a:fontRef idx="minor">
+            <a:schemeClr val="lt1"/>
+          </a:fontRef>
+        </p:style>
+        <p:txBody>
+          <a:bodyPr rtlCol="0" anchor="ctr" wrap="square" lIns="274320" tIns="274320"/>
+          <a:lstStyle/>
+          <a:p>
+            <a:pPr algn="ctr">
+              <a:defRPr sz="1400" b="1">
+                <a:solidFill>
+                  <a:srgbClr val="0284C7"/>
+                </a:solidFill>
+              </a:defRPr>
+            </a:pPr>
+            <a:r>
+              <a:t>FINANCIAL IMPACT SUMMARY</a:t>
+            </a:r>
+          </a:p>
+          <a:p>
+            <a:pPr>
+              <a:defRPr sz="3800" b="1">
+                <a:solidFill>
+                  <a:srgbClr val="16A34A"/>
+                </a:solidFill>
+              </a:defRPr>
+            </a:pPr>
+            <a:r>
+              <a:t>+$1,040,117.82</a:t>
+            </a:r>
+          </a:p>
+          <a:p>
+            <a:pPr>
+              <a:defRPr sz="1400" b="1">
+                <a:solidFill>
+                  <a:srgbClr val="FFFFFF"/>
+                </a:solidFill>
+              </a:defRPr>
+            </a:pPr>
+            <a:r>
+              <a:t>+4.2% Net Margin Expansion (43.7% ➔ 45.6%)</a:t>
+            </a:r>
+            <a:br/>
+          </a:p>
+          <a:p>
+            <a:r>
+              <a:rPr sz="1100">
+                <a:solidFill>
+                  <a:srgbClr val="94A3B8"/>
+                </a:solidFill>
+              </a:rPr>
+              <a:t>Total Net Revenue Base: </a:t>
+            </a:r>
+            <a:r>
+              <a:rPr sz="1100" b="1">
+                <a:solidFill>
+                  <a:srgbClr val="FFFFFF"/>
+                </a:solidFill>
+              </a:rPr>
+              <a:t>$55,984,370.00</a:t>
+            </a:r>
+          </a:p>
+          <a:p>
+            <a:r>
+              <a:rPr sz="1100">
+                <a:solidFill>
+                  <a:srgbClr val="94A3B8"/>
+                </a:solidFill>
+              </a:rPr>
+              <a:t>Baseline Net Operating Profit: </a:t>
+            </a:r>
+            <a:r>
+              <a:rPr sz="1100" b="1">
+                <a:solidFill>
+                  <a:srgbClr val="FFFFFF"/>
+                </a:solidFill>
+              </a:rPr>
+              <a:t>$24,491,388.08 (43.7%)</a:t>
+            </a:r>
+          </a:p>
+          <a:p>
+            <a:r>
+              <a:rPr sz="1100">
+                <a:solidFill>
+                  <a:srgbClr val="94A3B8"/>
+                </a:solidFill>
+              </a:rPr>
+              <a:t>Optimized Net Operating Profit: </a:t>
+            </a:r>
+            <a:r>
+              <a:rPr sz="1100" b="1">
+                <a:solidFill>
+                  <a:srgbClr val="FFFFFF"/>
+                </a:solidFill>
+              </a:rPr>
+              <a:t>$25,531,505.90 (45.6%)</a:t>
+            </a:r>
+          </a:p>
+          <a:p>
+            <a:r>
+              <a:rPr sz="1100">
+                <a:solidFill>
+                  <a:srgbClr val="94A3B8"/>
+                </a:solidFill>
+              </a:rPr>
+              <a:t>Baseline Penalty Fines Loss: </a:t>
+            </a:r>
+            <a:r>
+              <a:rPr sz="1100" b="1">
+                <a:solidFill>
+                  <a:srgbClr val="FFFFFF"/>
+                </a:solidFill>
+              </a:rPr>
+              <a:t>$634,632.00</a:t>
+            </a:r>
+          </a:p>
+          <a:p>
+            <a:r>
+              <a:rPr sz="1100">
+                <a:solidFill>
+                  <a:srgbClr val="94A3B8"/>
+                </a:solidFill>
+              </a:rPr>
+              <a:t>Optimized Penalty Fines Loss: </a:t>
+            </a:r>
+            <a:r>
+              <a:rPr sz="1100" b="1">
+                <a:solidFill>
+                  <a:srgbClr val="FFFFFF"/>
+                </a:solidFill>
+              </a:rPr>
+              <a:t>$114,233.76 (82% Reduction)</a:t>
+            </a:r>
+          </a:p>
+        </p:txBody>
+      </p:sp>
+      <p:sp>
+        <p:nvSpPr>
+          <p:cNvPr id="6" name="Rounded Rectangle 5"/>
+          <p:cNvSpPr/>
+          <p:nvPr/>
+        </p:nvSpPr>
+        <p:spPr>
+          <a:xfrm>
+            <a:off x="6217920" y="1280160"/>
+            <a:ext cx="5212080" cy="4937760"/>
+          </a:xfrm>
+          <a:prstGeom prst="roundRect">
+            <a:avLst/>
+          </a:prstGeom>
+          <a:solidFill>
+            <a:srgbClr val="F8FAFC"/>
+          </a:solidFill>
+          <a:ln>
+            <a:solidFill>
+              <a:srgbClr val="E2E8F0"/>
+            </a:solidFill>
+          </a:ln>
+        </p:spPr>
+        <p:style>
+          <a:lnRef idx="1">
+            <a:schemeClr val="accent1"/>
+          </a:lnRef>
+          <a:fillRef idx="3">
+            <a:schemeClr val="accent1"/>
+          </a:fillRef>
+          <a:effectRef idx="2">
+            <a:schemeClr val="accent1"/>
+          </a:effectRef>
+          <a:fontRef idx="minor">
+            <a:schemeClr val="lt1"/>
+          </a:fontRef>
+        </p:style>
+        <p:txBody>
+          <a:bodyPr rtlCol="0" anchor="ctr" wrap="square" lIns="274320" tIns="274320"/>
+          <a:lstStyle/>
+          <a:p>
+            <a:pPr algn="ctr">
+              <a:defRPr sz="1800" b="1">
+                <a:solidFill>
+                  <a:srgbClr val="0F172A"/>
+                </a:solidFill>
+              </a:defRPr>
+            </a:pPr>
+            <a:r>
+              <a:t>🚀 Executive Call to Action &amp; Next Steps</a:t>
+            </a:r>
+          </a:p>
+          <a:p>
+            <a:r>
+              <a:rPr sz="1200" b="1">
+                <a:solidFill>
+                  <a:srgbClr val="0284C7"/>
+                </a:solidFill>
+              </a:rPr>
+              <a:t>• Executive Approval: </a:t>
+            </a:r>
+            <a:r>
+              <a:rPr sz="1200" b="0">
+                <a:solidFill>
+                  <a:srgbClr val="1E293B"/>
+                </a:solidFill>
+              </a:rPr>
+              <a:t>Approve funding for Phase 1 Data Integration and ERP connector buildout.</a:t>
+            </a:r>
+          </a:p>
+          <a:p>
+            <a:r>
+              <a:rPr sz="1200" b="1">
+                <a:solidFill>
+                  <a:srgbClr val="0284C7"/>
+                </a:solidFill>
+              </a:rPr>
+              <a:t>• Logistics Policy Alignment: </a:t>
+            </a:r>
+            <a:r>
+              <a:rPr sz="1200" b="0">
+                <a:solidFill>
+                  <a:srgbClr val="1E293B"/>
+                </a:solidFill>
+              </a:rPr>
+              <a:t>Formalize the +50% allocation guardrail cap policy across regional distribution centers.</a:t>
+            </a:r>
+          </a:p>
+          <a:p>
+            <a:r>
+              <a:rPr sz="1200" b="1">
+                <a:solidFill>
+                  <a:srgbClr val="0284C7"/>
+                </a:solidFill>
+              </a:rPr>
+              <a:t>• Vendor SLA Enforcement: </a:t>
+            </a:r>
+            <a:r>
+              <a:rPr sz="1200" b="0">
+                <a:solidFill>
+                  <a:srgbClr val="1E293B"/>
+                </a:solidFill>
+              </a:rPr>
+              <a:t>Institute barcode verification protocols at Shenzhen and Vietnam manufacturing plants.</a:t>
+            </a:r>
+          </a:p>
+          <a:p>
+            <a:r>
+              <a:rPr sz="1200" b="1">
+                <a:solidFill>
+                  <a:srgbClr val="0284C7"/>
+                </a:solidFill>
+              </a:rPr>
+              <a:t>• Pilot Launch: </a:t>
+            </a:r>
+            <a:r>
+              <a:rPr sz="1200" b="0">
+                <a:solidFill>
+                  <a:srgbClr val="1E293B"/>
+                </a:solidFill>
+              </a:rPr>
+              <a:t>Initiate Month 1 pilot with Home Depot and Lowe's accounts.</a:t>
             </a:r>
           </a:p>
         </p:txBody>
